--- a/Executive_Summary/Project1_Insurance_Presentation.pptx
+++ b/Executive_Summary/Project1_Insurance_Presentation.pptx
@@ -390,16 +390,22 @@
             </a:pPr>
             <a:r>
               <a:rPr lang="en-US" sz="1200" dirty="0"/>
-              <a:t>15:00 to 16:20. Say this before you lean on the RMSE ranking. Blue is the median absolute error. Half of the left-out accounts are closer to the quote than that dot. Red is the mean of the same absolute errors, pulled right by a minority of bills.</a:t>
+              <a:t>15:00 to 16:20. So far random trees visually explains more of the unique variation in charges give the sample, and RMSE is the lowest.</a:t>
             </a:r>
           </a:p>
           <a:p>
             <a:pPr>
               <a:buNone/>
             </a:pPr>
+            <a:endParaRPr lang="en-US" sz="1200" dirty="0"/>
+          </a:p>
+          <a:p>
+            <a:pPr>
+              <a:buNone/>
+            </a:pPr>
             <a:r>
               <a:rPr lang="en-US" sz="1200" dirty="0"/>
-              <a:t>Right panel, smokers. The forest's median is $1,111. The equation's is $4,035. Averaged trees are about $3,011. For the typical smoker the forest is about $2,900 closer. That is the gain. The $192 of cross-validated RMSE was never this story.</a:t>
+              <a:t>before we lean on the RMSE ranking, let’s compare to the typical (or median) customer. Blue is the median absolute error. Half of the left-out accounts are closer to the quote. Red is the mean of the same absolute errors.</a:t>
             </a:r>
           </a:p>
           <a:p>
@@ -408,7 +414,7 @@
             </a:pPr>
             <a:r>
               <a:rPr lang="en-US" sz="1200" dirty="0"/>
-              <a:t>Left panel, non-smokers. The medians sit together, about $1,400 to $1,900. Neighbors are $1,402 and the forest is $1,428. Do not propose two scorers over $26. On non-smokers the equation is slightly closer on RMSE, about $4,612 against $4,811, and that gap is also inside the fold variation. The forest's win is the smoker book.</a:t>
+              <a:t>Non-smoking on the left, smoking on the right. </a:t>
             </a:r>
           </a:p>
           <a:p>
@@ -417,7 +423,22 @@
             </a:pPr>
             <a:r>
               <a:rPr lang="en-US" sz="1200" dirty="0"/>
-              <a:t>The outer margin has not gone away. It is the tail, not the typical account. And be straight about it: on the 95 percent absolute error for smokers, the equation is $9,489 and the forest is $9,800. The forest is not tighter there.</a:t>
+              <a:t>Right panel, The forest's median is $1,111. The equation's is $4,035. Averaged trees are about $3,011. For the typical smoker the forest is about $2,900 closer. </a:t>
+            </a:r>
+          </a:p>
+          <a:p>
+            <a:pPr>
+              <a:buNone/>
+            </a:pPr>
+            <a:endParaRPr lang="en-US" sz="1200" dirty="0"/>
+          </a:p>
+          <a:p>
+            <a:pPr>
+              <a:buNone/>
+            </a:pPr>
+            <a:r>
+              <a:rPr lang="en-US" sz="1200" dirty="0"/>
+              <a:t>Left panel, non-smokers. The medians sit together, about $1,400 to $1,900. Neighbors are $1,402 and the forest is $1,428. On non-smokers the equation is slightly closer on RMSE, because again smokers dominate the formula in our sample. The random forest's win is the smoker book, but not on the most extreme cases. Not depicted on this graph: adjusting for 95 percent absolute error for smokers, so testing against the most extreme cases, the equation is about $9,500 and the forest is $9,800. </a:t>
             </a:r>
           </a:p>
         </p:txBody>
@@ -520,40 +541,41 @@
           <a:bodyPr/>
           <a:lstStyle/>
           <a:p>
+            <a:pPr marL="0" marR="0" lvl="0" indent="0" algn="l" defTabSz="914400" rtl="0" eaLnBrk="1" fontAlgn="auto" latinLnBrk="0" hangingPunct="1">
+              <a:lnSpc>
+                <a:spcPct val="100000"/>
+              </a:lnSpc>
+              <a:spcBef>
+                <a:spcPts val="0"/>
+              </a:spcBef>
+              <a:spcAft>
+                <a:spcPts val="0"/>
+              </a:spcAft>
+              <a:buClrTx/>
+              <a:buSzTx/>
+              <a:buFontTx/>
+              <a:buNone/>
+              <a:tabLst/>
+              <a:defRPr/>
+            </a:pPr>
+            <a:r>
+              <a:rPr lang="en-US" sz="1200" dirty="0"/>
+              <a:t>Now with that additional context and looking back at RMSE, we still recommend the </a:t>
+            </a:r>
+            <a:r>
+              <a:rPr lang="en-US" sz="1200" dirty="0" err="1"/>
+              <a:t>nonparameteric</a:t>
+            </a:r>
+            <a:r>
+              <a:rPr lang="en-US" sz="1200" dirty="0"/>
+              <a:t> Random Forest model as the best trade-off between bias and variance given then sample. Among non-smokers the models performs about the same, but much better among smokers where it counts. On the holdout, 16 non-smokers have bills above $15,000. The equation misses that group by about $14,036 on average. The forest misses them by about $13,554. A more flexible scorer does not explain those accounts.</a:t>
+            </a:r>
+          </a:p>
+          <a:p>
             <a:pPr>
               <a:buNone/>
             </a:pPr>
-            <a:r>
-              <a:rPr lang="en-US" sz="1200" dirty="0"/>
-              <a:t>15:00 to 16:20. Say this before you lean on the RMSE ranking. Blue is the median absolute error. Half of the left-out accounts are closer to the quote than that dot. Red is the mean of the same absolute errors, pulled right by a minority of bills.</a:t>
-            </a:r>
-          </a:p>
-          <a:p>
-            <a:pPr>
-              <a:buNone/>
-            </a:pPr>
-            <a:r>
-              <a:rPr lang="en-US" sz="1200" dirty="0"/>
-              <a:t>Right panel, smokers. The forest's median is $1,111. The equation's is $4,035. Averaged trees are about $3,011. For the typical smoker the forest is about $2,900 closer. That is the gain. The $192 of cross-validated RMSE was never this story.</a:t>
-            </a:r>
-          </a:p>
-          <a:p>
-            <a:pPr>
-              <a:buNone/>
-            </a:pPr>
-            <a:r>
-              <a:rPr lang="en-US" sz="1200" dirty="0"/>
-              <a:t>Left panel, non-smokers. The medians sit together, about $1,400 to $1,900. Neighbors are $1,402 and the forest is $1,428. Do not propose two scorers over $26. On non-smokers the equation is slightly closer on RMSE, about $4,612 against $4,811, and that gap is also inside the fold variation. The forest's win is the smoker book.</a:t>
-            </a:r>
-          </a:p>
-          <a:p>
-            <a:pPr>
-              <a:buNone/>
-            </a:pPr>
-            <a:r>
-              <a:rPr lang="en-US" sz="1200" dirty="0"/>
-              <a:t>The outer margin has not gone away. It is the tail, not the typical account. And be straight about it: on the 95 percent absolute error for smokers, the equation is $9,489 and the forest is $9,800. The forest is not tighter there.</a:t>
-            </a:r>
+            <a:endParaRPr lang="en-US" sz="1200" dirty="0"/>
           </a:p>
         </p:txBody>
       </p:sp>
@@ -648,7 +670,7 @@
             </a:pPr>
             <a:r>
               <a:rPr lang="en-US" sz="1200" dirty="0"/>
-              <a:t>17:20 to 18:30. This is the decision. Two jobs, two tools. Say the $192 out loud so nobody leaves thinking the forest is a different business.</a:t>
+              <a:t>17:20 to 18:30. To conclude, we’re giving two tools for two jobs. </a:t>
             </a:r>
           </a:p>
           <a:p>
@@ -657,7 +679,7 @@
             </a:pPr>
             <a:r>
               <a:rPr lang="en-US" sz="1200" dirty="0"/>
-              <a:t>Explain with the equation. Age, children, a smoker gap that depends on BMI, and a regional level shift. Quote the paired bootstrap interval for the age slope and for the smoker gap at BMI 30. Do not quote the smoker coefficient. It is the gap at BMI 0. Do not call the southeast expensive after smoking and BMI are held fixed.</a:t>
+              <a:t>Explain with the equation. Age, children, a smoker gap that depends on BMI, and a regional level shift. Quote at BMI 30 when no BMI reading is available . Do not quote the smoker coefficient. It is the gap at BMI 0. Do not call the southeast expensive.</a:t>
             </a:r>
           </a:p>
           <a:p>
@@ -666,16 +688,7 @@
             </a:pPr>
             <a:r>
               <a:rPr lang="en-US" sz="1200" dirty="0"/>
-              <a:t>Price with the forest. Lowest RMSE on both checks. Use it because the quote levels off with the smoker cloud instead of climbing past it, and because the typical smoker is about $2,900 closer. It does not assume one residual spread. It also cannot say what a year of age is worth. Do not describe it as an explanation.</a:t>
-            </a:r>
-          </a:p>
-          <a:p>
-            <a:pPr>
-              <a:buNone/>
-            </a:pPr>
-            <a:r>
-              <a:rPr lang="en-US" sz="1200" dirty="0"/>
-              <a:t>The limit, in one sentence. On the holdout, 16 non-smokers have bills above $15,000. The equation misses that group by about $14,036 on average. The forest misses them by about $13,554. A more flexible scorer does not explain those accounts.</a:t>
+              <a:t>Price with the forest. Lowest RMSE on both checks. Use it because the quote levels off with the smoker cloud instead of climbing past it, and because the typical smoker is about $2,900 closer. It does represents the unique variance better than the equation, but cannot say what a year of age is worth. </a:t>
             </a:r>
           </a:p>
         </p:txBody>
@@ -765,7 +778,7 @@
             </a:pPr>
             <a:r>
               <a:rPr lang="en-US" sz="1200" dirty="0"/>
-              <a:t>18:30 to 20:00. Four limits, then stop. Do not add a method you did not run.</a:t>
+              <a:t>18:30 to 20:00. Couple quick notes on Scope.</a:t>
             </a:r>
           </a:p>
           <a:p>
@@ -774,7 +787,7 @@
             </a:pPr>
             <a:r>
               <a:rPr lang="en-US" sz="1200" dirty="0"/>
-              <a:t>Scope. Four region labels in this file. No household, plan, or year, so independence is an assumption, not a result. Generalizing past these labels is a guess.</a:t>
+              <a:t>Four region labels in this file. No household, plan, or year, so independence is an assumption, not a result. Generalizing past these labels is a guess.</a:t>
             </a:r>
           </a:p>
           <a:p>
@@ -801,8 +814,35 @@
             </a:pPr>
             <a:r>
               <a:rPr lang="en-US" sz="1200" dirty="0"/>
-              <a:t>More time. Diagnosis, plan design, deductible, and whether the charge is one year or many. Then a later book of accounts, not another split of this one, before treating a $192 edge as stable. Stop. The backup stays down unless someone asks how the penalty or the neighborhood behaved.</a:t>
-            </a:r>
+              <a:t>Mosti </a:t>
+            </a:r>
+            <a:r>
+              <a:rPr lang="en-US" sz="1200" dirty="0" err="1"/>
+              <a:t>mportantly</a:t>
+            </a:r>
+            <a:r>
+              <a:rPr lang="en-US" sz="1200" dirty="0"/>
+              <a:t>:</a:t>
+            </a:r>
+          </a:p>
+          <a:p>
+            <a:pPr>
+              <a:buNone/>
+            </a:pPr>
+            <a:r>
+              <a:rPr lang="en-US" sz="1200" dirty="0"/>
+              <a:t>Diagnosis, plan design, deductible, and whether the charge is one year or many. Then a later book of accounts, not another split of this one, before treating a $192 edge as stable. Stop. The backup stays down unless someone asks how the penalty or the neighborhood behaved.</a:t>
+            </a:r>
+          </a:p>
+          <a:p>
+            <a:pPr>
+              <a:buNone/>
+            </a:pPr>
+            <a:r>
+              <a:rPr lang="en-US" sz="1200"/>
+              <a:t>Any questions?</a:t>
+            </a:r>
+            <a:endParaRPr lang="en-US" sz="1200" dirty="0"/>
           </a:p>
         </p:txBody>
       </p:sp>
@@ -1164,7 +1204,7 @@
             </a:pPr>
             <a:r>
               <a:rPr lang="en-US" sz="1200" dirty="0"/>
-              <a:t>Sex is not clearly associated once the other facts are held fixed. The p-value is 0.062. </a:t>
+              <a:t>Sex is not clearly associated once the other facts are held fixed. </a:t>
             </a:r>
           </a:p>
           <a:p>
@@ -1290,7 +1330,7 @@
             </a:pPr>
             <a:r>
               <a:rPr lang="en-US" sz="1200" dirty="0"/>
-              <a:t>The right-hand list only names the facts. Forty-three people have four or five children, so the per-child slope is identified mostly from zero to three. Do not define BMI. If the clock is behind, two sentences and move on.</a:t>
+              <a:t>The right-hand list only names the facts. Forty-three people have four or five children, so the per-child slope is identified mostly from zero to three. </a:t>
             </a:r>
           </a:p>
         </p:txBody>
@@ -1380,7 +1420,7 @@
             </a:pPr>
             <a:r>
               <a:rPr lang="en-US" sz="1200" dirty="0"/>
-              <a:t>4:10 to 6:10. This slide is why the equation has an interaction and one age slope.</a:t>
+              <a:t>4:10 to 6:10. Since there is a clear delineation between smokers and non-smokers, we decided to view plots of other variables illustrating the difference. </a:t>
             </a:r>
           </a:p>
           <a:p>
@@ -1389,7 +1429,7 @@
             </a:pPr>
             <a:r>
               <a:rPr lang="en-US" sz="1200" dirty="0"/>
-              <a:t>Left, age. Say the correlations before you point: 0.63 among non-smokers and 0.37 among smokers. The lines are roughly parallel. Letting the age slope differ by smoker does not improve the dollar equation. Smoking is a level shift of tens of thousands of dollars. Age is a few hundred a year.</a:t>
+              <a:t>We found age had different correlations among smokers compared to non-smokers, but when plotted against charges we did not find a significant difference to move the bill as illustrated on the left.</a:t>
             </a:r>
           </a:p>
           <a:p>
@@ -1398,7 +1438,15 @@
             </a:pPr>
             <a:r>
               <a:rPr lang="en-US" sz="1200" dirty="0"/>
-              <a:t>Right, BMI. Correlation 0.81 for smokers and 0.08 for non-smokers. One smoker coefficient with a single BMI slope would average a steep line and a flat line into a number that is true of neither group. The smoker gap has to be stated at a BMI we actually see. BMI 0 is not an account. We quote 25, 30, and 35.</a:t>
+              <a:t>The right illustrates the opposite. using BMI to predict charges is highly dependent on if the customer is also a smoker. In short, Age is </a:t>
+            </a:r>
+            <a:r>
+              <a:rPr lang="en-US" sz="1200" dirty="0" err="1"/>
+              <a:t>linearily</a:t>
+            </a:r>
+            <a:r>
+              <a:rPr lang="en-US" sz="1200" dirty="0"/>
+              <a:t> correlated to the bill and BMI is only relevant among smokers.</a:t>
             </a:r>
           </a:p>
           <a:p>
@@ -1407,7 +1455,7 @@
             </a:pPr>
             <a:r>
               <a:rPr lang="en-US" sz="1200" dirty="0"/>
-              <a:t>Children, if you have the second: correlation with charges is about 0.07. The nested test keeps a per-child amount. We do not pretend the line is well seen past three children.</a:t>
+              <a:t>We saw the same interaction among children, but overall children had a low correlation to charges (.07) and there’s not many instances greater than 3 children per account.</a:t>
             </a:r>
           </a:p>
         </p:txBody>
@@ -1515,26 +1563,32 @@
             </a:pPr>
             <a:r>
               <a:rPr lang="en-US" sz="1200" dirty="0"/>
-              <a:t>6:10 to 7:40. The picture and the table are the same sentence: a high smoker band and a low non-smoker band in every region.</a:t>
+              <a:t>6:10 to 7:40. To answer your question if charges depends on region, yes but not as much as BMI, smoker or even age. Be careful when looking at the average bill by region. Southeast has the highest average BMI and Smoker share. </a:t>
             </a:r>
           </a:p>
           <a:p>
             <a:pPr>
               <a:buNone/>
             </a:pPr>
-            <a:r>
-              <a:rPr lang="en-US" sz="1200" dirty="0"/>
-              <a:t>Southeast smokers average $34,845 before any adjustment. Northeast smokers average $29,674. Southeast also has the highest average BMI, 33.4, and the highest smoker share, 25 percent. That is why the unadjusted southeast bill looks high.</a:t>
-            </a:r>
+            <a:endParaRPr lang="en-US" sz="1200" dirty="0"/>
           </a:p>
           <a:p>
             <a:pPr>
               <a:buNone/>
             </a:pPr>
             <a:r>
-              <a:rPr lang="en-US" sz="1200" dirty="0"/>
-              <a:t>Then the tests, slowly. The smoker gap does not depend on region, p = 0.31. The age slope does not, p = 0.28. The smoker BMI slope does not, p = 0.20. There is a smaller result that is not on this slide. The non-smoker BMI slope does differ by region, p = 0.011, and both of those slopes are tiny next to $1,461 a point for smokers. We report it and leave it out of the equation we would say out loud.</a:t>
-            </a:r>
+              <a:rPr lang="en-US" sz="1200" b="0" i="0" u="none" strike="noStrike" kern="1200" dirty="0">
+                <a:solidFill>
+                  <a:schemeClr val="tx1"/>
+                </a:solidFill>
+                <a:effectLst/>
+                <a:latin typeface="+mn-lt"/>
+                <a:ea typeface="+mn-ea"/>
+                <a:cs typeface="+mn-cs"/>
+              </a:rPr>
+              <a:t>For regional comparison only, holding age, children, BMI, and smoking status fixed, the southeast average is associated with $1,207 lower average charge amount relative to the northeast (-$1,959 to -$455), about 9.1% of the average bill. The southwest contrast is -$1,228 (-$1,978 to -$477). The northwest range includes zero (-$1,327 to $170).</a:t>
+            </a:r>
+            <a:endParaRPr lang="en-US" sz="1200" dirty="0"/>
           </a:p>
         </p:txBody>
       </p:sp>
@@ -1629,25 +1683,37 @@
             </a:pPr>
             <a:r>
               <a:rPr lang="en-US" sz="1200" dirty="0"/>
-              <a:t>7:40 to 9:10. Read the equation once, slowly. Then what we kept and what we refused.</a:t>
+              <a:t>7:40 to 9:10.  This is the equation we would tell your customers.</a:t>
             </a:r>
           </a:p>
           <a:p>
             <a:pPr>
               <a:buNone/>
             </a:pPr>
+            <a:endParaRPr lang="en-US" sz="1200" dirty="0"/>
+          </a:p>
+          <a:p>
+            <a:pPr>
+              <a:buNone/>
+            </a:pPr>
             <a:r>
               <a:rPr lang="en-US" sz="1200" dirty="0"/>
-              <a:t>Dollar scale. Non-smoker and northeast are the reference. Adjusted R-squared is 0.84. That is how much of this file the line tracks. It is not the dollar miss on a new account.</a:t>
+              <a:t>Read the equation once, slowly. Then what we kept and what we refused.</a:t>
             </a:r>
           </a:p>
           <a:p>
             <a:pPr>
               <a:buNone/>
             </a:pPr>
+            <a:endParaRPr lang="en-US" sz="1200" dirty="0"/>
+          </a:p>
+          <a:p>
+            <a:pPr>
+              <a:buNone/>
+            </a:pPr>
             <a:r>
               <a:rPr lang="en-US" sz="1200" dirty="0"/>
-              <a:t>Sex stays out. p = 0.062, close to the 5 percent line we used, and not a clear association. Say that if someone pushes. A different smoker gap by region stays out, p = 0.31. A different age slope, by region or by smoker, stays out.</a:t>
+              <a:t>Non-smoker and northeast are the reference. We’re about to explain 84% of the variation in charges with this equation. </a:t>
             </a:r>
           </a:p>
           <a:p>
@@ -1656,8 +1722,37 @@
             </a:pPr>
             <a:r>
               <a:rPr lang="en-US" sz="1200" dirty="0"/>
-              <a:t>We also fit the log of charges and did not adopt it. Say this only if asked, or on the residual slide. A common percent per year is too steep for smokers, and giving smokers their own age slope on the log scale makes the residual spreads unequal again.</a:t>
-            </a:r>
+              <a:t>A common percent per year is too steep for smokers, and giving smokers their own age slope on the log scale makes the residual spreads unequal again.</a:t>
+            </a:r>
+          </a:p>
+          <a:p>
+            <a:pPr marL="0" marR="0" lvl="0" indent="0" algn="l" defTabSz="914400" rtl="0" eaLnBrk="1" fontAlgn="auto" latinLnBrk="0" hangingPunct="1">
+              <a:lnSpc>
+                <a:spcPct val="100000"/>
+              </a:lnSpc>
+              <a:spcBef>
+                <a:spcPts val="0"/>
+              </a:spcBef>
+              <a:spcAft>
+                <a:spcPts val="0"/>
+              </a:spcAft>
+              <a:buClrTx/>
+              <a:buSzTx/>
+              <a:buFontTx/>
+              <a:buNone/>
+              <a:tabLst/>
+              <a:defRPr/>
+            </a:pPr>
+            <a:r>
+              <a:rPr lang="en-US" sz="1200" dirty="0"/>
+              <a:t>Dollar scale. We fit the log of charges and did not adopt it. </a:t>
+            </a:r>
+          </a:p>
+          <a:p>
+            <a:pPr>
+              <a:buNone/>
+            </a:pPr>
+            <a:endParaRPr lang="en-US" sz="1200" dirty="0"/>
           </a:p>
         </p:txBody>
       </p:sp>
@@ -1746,7 +1841,7 @@
             </a:pPr>
             <a:r>
               <a:rPr lang="en-US" sz="1200" dirty="0"/>
-              <a:t>10:50 to 12:10. Three clouds, then the handoff.</a:t>
+              <a:t>10:50 to 12:10. </a:t>
             </a:r>
           </a:p>
           <a:p>
@@ -1755,7 +1850,7 @@
             </a:pPr>
             <a:r>
               <a:rPr lang="en-US" sz="1200" dirty="0"/>
-              <a:t>The main non-smoker band sits near zero. The smoker cloud is wider and sits at higher fitted bills. A third group of non-smokers lands in the smoker range. We did not delete them. The largest Cook's distance is 0.055. A screen of 4 over n is about 0.003 and flags 92 rows at this sample size. It is a screen, not a deletion rule. Nothing dominates the fit.</a:t>
+              <a:t>We didn’t adopt a transformation because there’s a unique distribution of errors with any equation or transformation we use. </a:t>
             </a:r>
           </a:p>
           <a:p>
@@ -1764,7 +1859,7 @@
             </a:pPr>
             <a:r>
               <a:rPr lang="en-US" sz="1200" dirty="0"/>
-              <a:t>Forty-eight accounts have a studentized residual beyond 3. Almost all are non-smokers. Nothing in the file explains them. Smoker residual SD is $5,717. Non-smoker residual SD is $4,588. The ratio is about 1.25.</a:t>
+              <a:t>The main non-smoker band sits near zero. The smoker cloud is wider and sits at higher fitted bills. A third group of non-smokers lands in the smoker range. We did not delete them. The largest Cook's distance is 0.055. A screen of 4 over n is about 0.003 and flags 92 rows at this sample size. It is a screen, not a deletion rule. None over leverage the equation, only the combination is unexplained.</a:t>
             </a:r>
           </a:p>
           <a:p>
@@ -1773,7 +1868,7 @@
             </a:pPr>
             <a:r>
               <a:rPr lang="en-US" sz="1200" dirty="0"/>
-              <a:t>A log scale looks calmer and we refused it. On the log, a common age slope is rejected. Putting in a different age slope for smokers makes the spreads unequal again. This is why we will not publish one linear error bar, even though this equation is what we would explain. Hand the pricing half to your partner.</a:t>
+              <a:t>Forty-eight accounts have a studentized residual beyond 3. Almost all are non-smokers. A log scale looks calmer and we refused it, because the model becomes over simplified increasing errors. Adding the complexity for our original analysis and the variation looks like the plot on the left again. This is why we will not predict charges with this equation.</a:t>
             </a:r>
           </a:p>
         </p:txBody>
@@ -1863,34 +1958,30 @@
             </a:pPr>
             <a:r>
               <a:rPr lang="en-US" sz="1200" dirty="0"/>
-              <a:t>12:10 to 13:30. Do not read every row. Point at the tan row, then at two failures.</a:t>
+              <a:t>12:10 to 13:30. We tested 7 models using a 10-fold cross-validation, the same folds for every method, and one 80/20 holdout, recording root-mean-squared-error. The random forest is lowest on both tests. $4,624 cross-validated, $4,366 on the holdout. Against the explanatory equation two slides </a:t>
+            </a:r>
+            <a:r>
+              <a:rPr lang="en-US" sz="1200" dirty="0" err="1"/>
+              <a:t>agao</a:t>
+            </a:r>
+            <a:r>
+              <a:rPr lang="en-US" sz="1200" dirty="0"/>
+              <a:t>, cross-validated gap is $192. The forest's fold-to-fold standard deviation is $763, so that edge is inside the variation. </a:t>
             </a:r>
           </a:p>
           <a:p>
             <a:pPr>
               <a:buNone/>
             </a:pPr>
+            <a:endParaRPr lang="en-US" sz="1200" dirty="0"/>
+          </a:p>
+          <a:p>
+            <a:pPr>
+              <a:buNone/>
+            </a:pPr>
             <a:r>
               <a:rPr lang="en-US" sz="1200" dirty="0"/>
-              <a:t>The metric is root-mean-square error, in dollars. Say it once. The columns are a 10-fold cross-validation, the same folds for every method, and one 80/20 holdout: 1,072 accounts to fit, 265 to score. Seed 1234.</a:t>
-            </a:r>
-          </a:p>
-          <a:p>
-            <a:pPr>
-              <a:buNone/>
-            </a:pPr>
-            <a:r>
-              <a:rPr lang="en-US" sz="1200" dirty="0"/>
-              <a:t>The forest is lowest on both: $4,624 cross-validated, $4,366 on the holdout. The explanation equation is $4,816 and $4,714. The cross-validated gap is $192. The forest's fold-to-fold standard deviation is $763, so that edge is inside the variation. Do not sell a transformation in accuracy.</a:t>
-            </a:r>
-          </a:p>
-          <a:p>
-            <a:pPr>
-              <a:buNone/>
-            </a:pPr>
-            <a:r>
-              <a:rPr lang="en-US" sz="1200" dirty="0"/>
-              <a:t>The term search has a better AIC, about 21,258 against 21,267, because that is the score it was asked to optimize. Its cross-validated RMSE is $4,836, slightly worse. AIC does not price a new account. Averaged trees beat the equation on the holdout, at $4,448, and lose the cross-validation, at $4,867. One split is not the decision. The reason to score with the forest is the shape on the next slide, not the $192.</a:t>
+              <a:t>The term search has a better AIC, because that is the score it we used to optimize. Its cross-validated RMSE is $4,836, slightly worse. Averaged trees beat the equation on the holdout, and lose the cross-validation. We don’t view RMSE as a single source of truth. </a:t>
             </a:r>
           </a:p>
         </p:txBody>
@@ -1980,7 +2071,15 @@
             </a:pPr>
             <a:r>
               <a:rPr lang="en-US" sz="1200" dirty="0"/>
-              <a:t>13:30 to 15:00. This is the picture. Do not read the legend item by item.</a:t>
+              <a:t>13:30 to 15:00. To understand the trade-off between </a:t>
+            </a:r>
+            <a:r>
+              <a:rPr lang="en-US" sz="1200" dirty="0" err="1"/>
+              <a:t>overfiting</a:t>
+            </a:r>
+            <a:r>
+              <a:rPr lang="en-US" sz="1200" dirty="0"/>
+              <a:t> and underfitting a model, and to help select the most practical model, let’s take a look at the predictive power of each model to a typical customer.</a:t>
             </a:r>
           </a:p>
           <a:p>
@@ -1989,7 +2088,7 @@
             </a:pPr>
             <a:r>
               <a:rPr lang="en-US" sz="1200" dirty="0"/>
-              <a:t>Age is held at 39, children at one, female, northeast. The gray points are real accounts within five years of 39. A line that sits off the cloud is bias. A line that jumps from one BMI to the next is variance.</a:t>
+              <a:t>Age is held at 39, children at one, female lives in northeast. The gray points are real accounts within five years of age 39. A line that sits off the cloud is bias (underfit). A line that jumps from one BMI to the next is variance (overfit).</a:t>
             </a:r>
           </a:p>
           <a:p>
@@ -1998,7 +2097,7 @@
             </a:pPr>
             <a:r>
               <a:rPr lang="en-US" sz="1200" dirty="0"/>
-              <a:t>Left, non-smokers. Every method sits in the lower cloud. None of them climbs to the accounts whose bills are far above that band. The orange neighbor line wiggles toward a few of those points and falls back. The wiggle does not explain the band.</a:t>
+              <a:t>Left, non-smoker. Every method sits in the lower cloud. None of them climbs to the accounts whose bills are far above that band. The orange neighbor line wiggles toward a few of those points and falls back. The wiggle does not explain the band.</a:t>
             </a:r>
           </a:p>
           <a:p>
@@ -2007,7 +2106,7 @@
             </a:pPr>
             <a:r>
               <a:rPr lang="en-US" sz="1200" dirty="0"/>
-              <a:t>Right, smokers. The straight lines keep climbing and pass $60,000. The cloud flattens. Around a BMI of 30 the forest, the neighbors, and the averaged trees step up and then level off. The straight line is biased high once BMI is high. The forest is the calmest line that is allowed to bend. The neighbors still jump.</a:t>
+              <a:t>Right, smokers. The straight lines keep climbing and pass $60,000 when The actual flattens out. Around a BMI of 30 the forest, the neighbors, and the averaged trees step up and then level off. The straight line is biased high once BMI is high. The forest is the calmest line that is allowed to bend. The nearest neighbors  model still jump.</a:t>
             </a:r>
           </a:p>
           <a:p>
@@ -2016,7 +2115,7 @@
             </a:pPr>
             <a:r>
               <a:rPr lang="en-US" sz="1200" dirty="0"/>
-              <a:t>One sentence on the margin, then leave it for the close. For the forest, 95 percent of left-out smoker bills fell within $9,800 of the quote, and 95 percent of non-smoker bills within $12,486. The tail is a bill above the quote. Do not convert it to a percent of the average bill.</a:t>
+              <a:t>For the forest, 95 percent of left-out smoker bills fell within $9,800 of the quote, and 95 percent of non-smoker bills within $12,486. </a:t>
             </a:r>
           </a:p>
         </p:txBody>
@@ -3366,13 +3465,13 @@
   <p:clrMapOvr>
     <a:masterClrMapping/>
   </p:clrMapOvr>
-  <mc:AlternateContent xmlns:mc="http://schemas.openxmlformats.org/markup-compatibility/2006">
-    <mc:Choice xmlns:p14="http://schemas.microsoft.com/office/powerpoint/2010/main" Requires="p14">
+  <mc:AlternateContent xmlns:mc="http://schemas.openxmlformats.org/markup-compatibility/2006" xmlns:p14="http://schemas.microsoft.com/office/powerpoint/2010/main">
+    <mc:Choice Requires="p14">
       <p:transition spd="med" p14:dur="700">
         <p:fade/>
       </p:transition>
     </mc:Choice>
-    <mc:Fallback>
+    <mc:Fallback xmlns="">
       <p:transition spd="med">
         <p:fade/>
       </p:transition>
@@ -3821,7 +3920,7 @@
                 <a:ea typeface="Calibri" pitchFamily="34" charset="-122"/>
                 <a:cs typeface="Calibri" pitchFamily="34" charset="-120"/>
               </a:rPr>
-              <a:t>Lowest RMSE on the 10-fold CV and the holdout. The CV edge is $192, inside a $763 fold SD. The gain is the typical smoker, about $1,111 versus $4,035. One residual spread does not fit both groups. This is not an explanation.</a:t>
+              <a:t>Lowest RMSE on the 10-fold CV and the holdout. The CV edge is $192, inside a $763 fold SD. The gain is the typical smoker, about $1,111 versus $4,035. </a:t>
             </a:r>
             <a:endParaRPr lang="en-US" sz="1600" dirty="0"/>
           </a:p>
@@ -3938,7 +4037,7 @@
                 <a:ea typeface="Calibri" pitchFamily="34" charset="-122"/>
                 <a:cs typeface="Calibri" pitchFamily="34" charset="-120"/>
               </a:rPr>
-              <a:t>Age, children, a smoker gap that depends on BMI, and a regional level shift. Quote the paired bootstrap interval on age and on the smoker gap at BMI 30. Do not quote the smoker coefficient at BMI 0. Do not call the southeast expensive after smoking and BMI are held fixed.</a:t>
+              <a:t>Age, children, a smoker gap that depends on BMI, and a regional level shift. Quote at BMI 30. Do not quote the smoker coefficient at BMI 0. Do not call the southeast expensive.</a:t>
             </a:r>
             <a:endParaRPr lang="en-US" sz="1600" dirty="0"/>
           </a:p>
@@ -4559,13 +4658,13 @@
   <p:clrMapOvr>
     <a:masterClrMapping/>
   </p:clrMapOvr>
-  <mc:AlternateContent xmlns:mc="http://schemas.openxmlformats.org/markup-compatibility/2006">
-    <mc:Choice xmlns:p14="http://schemas.microsoft.com/office/powerpoint/2010/main" Requires="p14">
+  <mc:AlternateContent xmlns:mc="http://schemas.openxmlformats.org/markup-compatibility/2006" xmlns:p14="http://schemas.microsoft.com/office/powerpoint/2010/main">
+    <mc:Choice Requires="p14">
       <p:transition spd="med" p14:dur="700">
         <p:fade/>
       </p:transition>
     </mc:Choice>
-    <mc:Fallback>
+    <mc:Fallback xmlns="">
       <p:transition spd="med">
         <p:fade/>
       </p:transition>
@@ -5064,13 +5163,13 @@
   <p:clrMapOvr>
     <a:masterClrMapping/>
   </p:clrMapOvr>
-  <mc:AlternateContent xmlns:mc="http://schemas.openxmlformats.org/markup-compatibility/2006">
-    <mc:Choice xmlns:p14="http://schemas.microsoft.com/office/powerpoint/2010/main" Requires="p14">
+  <mc:AlternateContent xmlns:mc="http://schemas.openxmlformats.org/markup-compatibility/2006" xmlns:p14="http://schemas.microsoft.com/office/powerpoint/2010/main">
+    <mc:Choice Requires="p14">
       <p:transition spd="med" p14:dur="700">
         <p:fade/>
       </p:transition>
     </mc:Choice>
-    <mc:Fallback>
+    <mc:Fallback xmlns="">
       <p:transition spd="med">
         <p:fade/>
       </p:transition>
@@ -5391,13 +5490,13 @@
   <p:clrMapOvr>
     <a:masterClrMapping/>
   </p:clrMapOvr>
-  <mc:AlternateContent xmlns:mc="http://schemas.openxmlformats.org/markup-compatibility/2006">
-    <mc:Choice xmlns:p14="http://schemas.microsoft.com/office/powerpoint/2010/main" Requires="p14">
+  <mc:AlternateContent xmlns:mc="http://schemas.openxmlformats.org/markup-compatibility/2006" xmlns:p14="http://schemas.microsoft.com/office/powerpoint/2010/main">
+    <mc:Choice Requires="p14">
       <p:transition spd="med" p14:dur="700">
         <p:fade/>
       </p:transition>
     </mc:Choice>
-    <mc:Fallback>
+    <mc:Fallback xmlns="">
       <p:transition spd="med">
         <p:fade/>
       </p:transition>
@@ -10376,67 +10475,6 @@
       </p:sp>
       <p:sp>
         <p:nvSpPr>
-          <p:cNvPr id="7" name="Text 3">
-            <a:extLst>
-              <a:ext uri="{FF2B5EF4-FFF2-40B4-BE49-F238E27FC236}">
-                <a16:creationId xmlns:a16="http://schemas.microsoft.com/office/drawing/2014/main" id="{6FF1DCE7-0B55-3D49-6E12-A078B8A6C672}"/>
-              </a:ext>
-            </a:extLst>
-          </p:cNvPr>
-          <p:cNvSpPr/>
-          <p:nvPr/>
-        </p:nvSpPr>
-        <p:spPr>
-          <a:xfrm>
-            <a:off x="464748" y="4595992"/>
-            <a:ext cx="5403902" cy="1417320"/>
-          </a:xfrm>
-          <a:prstGeom prst="rect">
-            <a:avLst/>
-          </a:prstGeom>
-          <a:noFill/>
-          <a:ln/>
-        </p:spPr>
-        <p:txBody>
-          <a:bodyPr wrap="square" lIns="0" tIns="0" rIns="0" bIns="0" rtlCol="0" anchor="ctr"/>
-          <a:lstStyle/>
-          <a:p>
-            <a:r>
-              <a:rPr lang="en-US" sz="1500" dirty="0">
-                <a:solidFill>
-                  <a:srgbClr val="4E463C"/>
-                </a:solidFill>
-                <a:latin typeface="Calibri" pitchFamily="34" charset="0"/>
-                <a:cs typeface="Calibri" pitchFamily="34" charset="-120"/>
-              </a:rPr>
-              <a:t>Southeast smokers average $34,845 before any adjustment. Northeast smokers average $29,674. </a:t>
-            </a:r>
-          </a:p>
-          <a:p>
-            <a:endParaRPr lang="en-US" sz="1500" dirty="0">
-              <a:solidFill>
-                <a:srgbClr val="4E463C"/>
-              </a:solidFill>
-              <a:latin typeface="Calibri" pitchFamily="34" charset="0"/>
-              <a:cs typeface="Calibri" pitchFamily="34" charset="-120"/>
-            </a:endParaRPr>
-          </a:p>
-          <a:p>
-            <a:r>
-              <a:rPr lang="en-US" sz="1500" dirty="0">
-                <a:solidFill>
-                  <a:srgbClr val="4E463C"/>
-                </a:solidFill>
-                <a:latin typeface="Calibri" pitchFamily="34" charset="0"/>
-                <a:cs typeface="Calibri" pitchFamily="34" charset="-120"/>
-              </a:rPr>
-              <a:t>Region is mostly who is in the band, plus a level shift once smoking and BMI are held fixed. </a:t>
-            </a:r>
-          </a:p>
-        </p:txBody>
-      </p:sp>
-      <p:sp>
-        <p:nvSpPr>
           <p:cNvPr id="8" name="Text 4">
             <a:extLst>
               <a:ext uri="{FF2B5EF4-FFF2-40B4-BE49-F238E27FC236}">
@@ -10470,7 +10508,7 @@
                 <a:latin typeface="Calibri" pitchFamily="34" charset="0"/>
                 <a:cs typeface="Calibri" pitchFamily="34" charset="-120"/>
               </a:rPr>
-              <a:t>The smoker gap does not depend on region (p = 0.31). The age slope does not (p = 0.28), nor the smoker BMI slope (p = 0.20).</a:t>
+              <a:t>The smoker gap does not depend on region (p = 0.31). The age slope does not depend on region (p = 0.28), nor the smoker BMI slope (p = 0.20).</a:t>
             </a:r>
           </a:p>
           <a:p>
@@ -10491,7 +10529,7 @@
                 <a:latin typeface="Calibri" pitchFamily="34" charset="0"/>
                 <a:cs typeface="Calibri" pitchFamily="34" charset="-120"/>
               </a:rPr>
-              <a:t>Southeast has the highest unadjusted average bill, the highest average BMI, and the highest smoker share. </a:t>
+              <a:t>Southeast has the highest unadjusted average bill, lowest when holding age, children, BMI and smoking status fixed.</a:t>
             </a:r>
           </a:p>
           <a:p>
@@ -10685,13 +10723,13 @@
           <p:nvPr>
             <p:extLst>
               <p:ext uri="{D42A27DB-BD31-4B8C-83A1-F6EECF244321}">
-                <p14:modId xmlns:p14="http://schemas.microsoft.com/office/powerpoint/2010/main" val="2807438381"/>
+                <p14:modId xmlns:p14="http://schemas.microsoft.com/office/powerpoint/2010/main" val="714056586"/>
               </p:ext>
             </p:extLst>
           </p:nvPr>
         </p:nvGraphicFramePr>
         <p:xfrm>
-          <a:off x="502920" y="1874520"/>
+          <a:off x="502920" y="1535310"/>
           <a:ext cx="5486400" cy="2139696"/>
         </p:xfrm>
         <a:graphic>
@@ -10952,7 +10990,7 @@
                         </a:rPr>
                         <a:t>Northeast</a:t>
                       </a:r>
-                      <a:endParaRPr lang="en-US" sz="1400" b="0" i="0">
+                      <a:endParaRPr lang="en-US" sz="1400" b="0" i="0" dirty="0">
                         <a:solidFill>
                           <a:srgbClr val="333333"/>
                         </a:solidFill>
@@ -11682,6 +11720,931 @@
           </a:graphicData>
         </a:graphic>
       </p:graphicFrame>
+      <p:sp>
+        <p:nvSpPr>
+          <p:cNvPr id="13" name="TextBox 12">
+            <a:extLst>
+              <a:ext uri="{FF2B5EF4-FFF2-40B4-BE49-F238E27FC236}">
+                <a16:creationId xmlns:a16="http://schemas.microsoft.com/office/drawing/2014/main" id="{02AEA2EE-CCB8-12F6-7BE0-CDCE57D4636B}"/>
+              </a:ext>
+            </a:extLst>
+          </p:cNvPr>
+          <p:cNvSpPr txBox="1"/>
+          <p:nvPr/>
+        </p:nvSpPr>
+        <p:spPr>
+          <a:xfrm>
+            <a:off x="2947300" y="5821291"/>
+            <a:ext cx="1042204" cy="369332"/>
+          </a:xfrm>
+          <a:prstGeom prst="rect">
+            <a:avLst/>
+          </a:prstGeom>
+          <a:noFill/>
+        </p:spPr>
+        <p:txBody>
+          <a:bodyPr wrap="square" rtlCol="0">
+            <a:spAutoFit/>
+          </a:bodyPr>
+          <a:lstStyle/>
+          <a:p>
+            <a:r>
+              <a:rPr lang="en-US" b="1" dirty="0">
+                <a:solidFill>
+                  <a:srgbClr val="000000"/>
+                </a:solidFill>
+                <a:latin typeface="Calibri" pitchFamily="34" charset="0"/>
+                <a:cs typeface="Calibri" pitchFamily="34" charset="-120"/>
+              </a:rPr>
+              <a:t>-$1,200</a:t>
+            </a:r>
+          </a:p>
+        </p:txBody>
+      </p:sp>
+      <p:pic>
+        <p:nvPicPr>
+          <p:cNvPr id="16" name="Graphic 15" descr="Compass with solid fill">
+            <a:extLst>
+              <a:ext uri="{FF2B5EF4-FFF2-40B4-BE49-F238E27FC236}">
+                <a16:creationId xmlns:a16="http://schemas.microsoft.com/office/drawing/2014/main" id="{DAC7C89C-9FBF-DC31-675C-618225C54E97}"/>
+              </a:ext>
+            </a:extLst>
+          </p:cNvPr>
+          <p:cNvPicPr>
+            <a:picLocks noChangeAspect="1"/>
+          </p:cNvPicPr>
+          <p:nvPr/>
+        </p:nvPicPr>
+        <p:blipFill>
+          <a:blip>
+            <a:extLst>
+              <a:ext uri="{96DAC541-7B7A-43D3-8B79-37D633B846F1}">
+                <asvg:svgBlip xmlns:asvg="http://schemas.microsoft.com/office/drawing/2016/SVG/main" r:embed="rId4"/>
+              </a:ext>
+            </a:extLst>
+          </a:blip>
+          <a:stretch>
+            <a:fillRect/>
+          </a:stretch>
+        </p:blipFill>
+        <p:spPr>
+          <a:xfrm rot="18873851">
+            <a:off x="2819781" y="4722709"/>
+            <a:ext cx="1199962" cy="1199962"/>
+          </a:xfrm>
+          <a:prstGeom prst="rect">
+            <a:avLst/>
+          </a:prstGeom>
+        </p:spPr>
+      </p:pic>
+      <p:sp>
+        <p:nvSpPr>
+          <p:cNvPr id="18" name="TextBox 17">
+            <a:extLst>
+              <a:ext uri="{FF2B5EF4-FFF2-40B4-BE49-F238E27FC236}">
+                <a16:creationId xmlns:a16="http://schemas.microsoft.com/office/drawing/2014/main" id="{4A569EC8-16F8-E2DD-00DD-48EC370736D5}"/>
+              </a:ext>
+            </a:extLst>
+          </p:cNvPr>
+          <p:cNvSpPr txBox="1"/>
+          <p:nvPr/>
+        </p:nvSpPr>
+        <p:spPr>
+          <a:xfrm>
+            <a:off x="3233305" y="4465966"/>
+            <a:ext cx="372914" cy="369332"/>
+          </a:xfrm>
+          <a:prstGeom prst="rect">
+            <a:avLst/>
+          </a:prstGeom>
+          <a:noFill/>
+        </p:spPr>
+        <p:txBody>
+          <a:bodyPr wrap="square" rtlCol="0">
+            <a:spAutoFit/>
+          </a:bodyPr>
+          <a:lstStyle/>
+          <a:p>
+            <a:r>
+              <a:rPr lang="en-US" b="1" dirty="0">
+                <a:solidFill>
+                  <a:srgbClr val="000000"/>
+                </a:solidFill>
+                <a:latin typeface="Calibri" pitchFamily="34" charset="0"/>
+                <a:cs typeface="Calibri" pitchFamily="34" charset="-120"/>
+              </a:rPr>
+              <a:t>N</a:t>
+            </a:r>
+          </a:p>
+        </p:txBody>
+      </p:sp>
+      <p:pic>
+        <p:nvPicPr>
+          <p:cNvPr id="22" name="Graphic 21" descr="No smoking outline">
+            <a:extLst>
+              <a:ext uri="{FF2B5EF4-FFF2-40B4-BE49-F238E27FC236}">
+                <a16:creationId xmlns:a16="http://schemas.microsoft.com/office/drawing/2014/main" id="{CEEEA680-B7EC-5421-F449-783A14BA152F}"/>
+              </a:ext>
+            </a:extLst>
+          </p:cNvPr>
+          <p:cNvPicPr>
+            <a:picLocks noChangeAspect="1"/>
+          </p:cNvPicPr>
+          <p:nvPr/>
+        </p:nvPicPr>
+        <p:blipFill>
+          <a:blip>
+            <a:extLst>
+              <a:ext uri="{96DAC541-7B7A-43D3-8B79-37D633B846F1}">
+                <asvg:svgBlip xmlns:asvg="http://schemas.microsoft.com/office/drawing/2016/SVG/main" r:embed="rId5"/>
+              </a:ext>
+            </a:extLst>
+          </a:blip>
+          <a:stretch>
+            <a:fillRect/>
+          </a:stretch>
+        </p:blipFill>
+        <p:spPr>
+          <a:xfrm>
+            <a:off x="2365630" y="3811123"/>
+            <a:ext cx="914400" cy="914400"/>
+          </a:xfrm>
+          <a:prstGeom prst="rect">
+            <a:avLst/>
+          </a:prstGeom>
+        </p:spPr>
+      </p:pic>
+      <p:grpSp>
+        <p:nvGrpSpPr>
+          <p:cNvPr id="40" name="Group 39">
+            <a:extLst>
+              <a:ext uri="{FF2B5EF4-FFF2-40B4-BE49-F238E27FC236}">
+                <a16:creationId xmlns:a16="http://schemas.microsoft.com/office/drawing/2014/main" id="{7745882C-D1F5-CEC4-ABB8-6A185552CFA9}"/>
+              </a:ext>
+            </a:extLst>
+          </p:cNvPr>
+          <p:cNvGrpSpPr/>
+          <p:nvPr/>
+        </p:nvGrpSpPr>
+        <p:grpSpPr>
+          <a:xfrm>
+            <a:off x="1199009" y="4588584"/>
+            <a:ext cx="724109" cy="724109"/>
+            <a:chOff x="1494513" y="5075282"/>
+            <a:chExt cx="724109" cy="724109"/>
+          </a:xfrm>
+        </p:grpSpPr>
+        <p:pic>
+          <p:nvPicPr>
+            <p:cNvPr id="20" name="Graphic 19" descr="Man with cane outline">
+              <a:extLst>
+                <a:ext uri="{FF2B5EF4-FFF2-40B4-BE49-F238E27FC236}">
+                  <a16:creationId xmlns:a16="http://schemas.microsoft.com/office/drawing/2014/main" id="{3EE1319E-1356-A000-E68D-550965570203}"/>
+                </a:ext>
+              </a:extLst>
+            </p:cNvPr>
+            <p:cNvPicPr>
+              <a:picLocks noChangeAspect="1"/>
+            </p:cNvPicPr>
+            <p:nvPr/>
+          </p:nvPicPr>
+          <p:blipFill>
+            <a:blip>
+              <a:extLst>
+                <a:ext uri="{96DAC541-7B7A-43D3-8B79-37D633B846F1}">
+                  <asvg:svgBlip xmlns:asvg="http://schemas.microsoft.com/office/drawing/2016/SVG/main" r:embed="rId6"/>
+                </a:ext>
+              </a:extLst>
+            </a:blip>
+            <a:stretch>
+              <a:fillRect/>
+            </a:stretch>
+          </p:blipFill>
+          <p:spPr>
+            <a:xfrm>
+              <a:off x="1566760" y="5147529"/>
+              <a:ext cx="579615" cy="579615"/>
+            </a:xfrm>
+            <a:prstGeom prst="rect">
+              <a:avLst/>
+            </a:prstGeom>
+          </p:spPr>
+        </p:pic>
+        <p:sp>
+          <p:nvSpPr>
+            <p:cNvPr id="33" name="Freeform 32">
+              <a:extLst>
+                <a:ext uri="{FF2B5EF4-FFF2-40B4-BE49-F238E27FC236}">
+                  <a16:creationId xmlns:a16="http://schemas.microsoft.com/office/drawing/2014/main" id="{2BA32F2A-626B-66C1-549A-5B592451B91A}"/>
+                </a:ext>
+              </a:extLst>
+            </p:cNvPr>
+            <p:cNvSpPr/>
+            <p:nvPr/>
+          </p:nvSpPr>
+          <p:spPr>
+            <a:xfrm>
+              <a:off x="1494513" y="5075282"/>
+              <a:ext cx="724109" cy="724109"/>
+            </a:xfrm>
+            <a:custGeom>
+              <a:avLst/>
+              <a:gdLst>
+                <a:gd name="csX0" fmla="*/ 362160 w 724109"/>
+                <a:gd name="csY0" fmla="*/ 0 h 724109"/>
+                <a:gd name="csX1" fmla="*/ 0 w 724109"/>
+                <a:gd name="csY1" fmla="*/ 361950 h 724109"/>
+                <a:gd name="csX2" fmla="*/ 361950 w 724109"/>
+                <a:gd name="csY2" fmla="*/ 724110 h 724109"/>
+                <a:gd name="csX3" fmla="*/ 724110 w 724109"/>
+                <a:gd name="csY3" fmla="*/ 362160 h 724109"/>
+                <a:gd name="csX4" fmla="*/ 724110 w 724109"/>
+                <a:gd name="csY4" fmla="*/ 362055 h 724109"/>
+                <a:gd name="csX5" fmla="*/ 362455 w 724109"/>
+                <a:gd name="csY5" fmla="*/ 0 h 724109"/>
+                <a:gd name="csX6" fmla="*/ 362160 w 724109"/>
+                <a:gd name="csY6" fmla="*/ 0 h 724109"/>
+                <a:gd name="csX7" fmla="*/ 362160 w 724109"/>
+                <a:gd name="csY7" fmla="*/ 705050 h 724109"/>
+                <a:gd name="csX8" fmla="*/ 19260 w 724109"/>
+                <a:gd name="csY8" fmla="*/ 362455 h 724109"/>
+                <a:gd name="csX9" fmla="*/ 113271 w 724109"/>
+                <a:gd name="csY9" fmla="*/ 126492 h 724109"/>
+                <a:gd name="csX10" fmla="*/ 597741 w 724109"/>
+                <a:gd name="csY10" fmla="*/ 610962 h 724109"/>
+                <a:gd name="csX11" fmla="*/ 362160 w 724109"/>
+                <a:gd name="csY11" fmla="*/ 705050 h 724109"/>
+                <a:gd name="csX12" fmla="*/ 611200 w 724109"/>
+                <a:gd name="csY12" fmla="*/ 597494 h 724109"/>
+                <a:gd name="csX13" fmla="*/ 126740 w 724109"/>
+                <a:gd name="csY13" fmla="*/ 113024 h 724109"/>
+                <a:gd name="csX14" fmla="*/ 611205 w 724109"/>
+                <a:gd name="csY14" fmla="*/ 125945 h 724109"/>
+                <a:gd name="csX15" fmla="*/ 611200 w 724109"/>
+                <a:gd name="csY15" fmla="*/ 597494 h 724109"/>
+              </a:gdLst>
+              <a:ahLst/>
+              <a:cxnLst>
+                <a:cxn ang="0">
+                  <a:pos x="csX0" y="csY0"/>
+                </a:cxn>
+                <a:cxn ang="0">
+                  <a:pos x="csX1" y="csY1"/>
+                </a:cxn>
+                <a:cxn ang="0">
+                  <a:pos x="csX2" y="csY2"/>
+                </a:cxn>
+                <a:cxn ang="0">
+                  <a:pos x="csX3" y="csY3"/>
+                </a:cxn>
+                <a:cxn ang="0">
+                  <a:pos x="csX4" y="csY4"/>
+                </a:cxn>
+                <a:cxn ang="0">
+                  <a:pos x="csX5" y="csY5"/>
+                </a:cxn>
+                <a:cxn ang="0">
+                  <a:pos x="csX6" y="csY6"/>
+                </a:cxn>
+                <a:cxn ang="0">
+                  <a:pos x="csX7" y="csY7"/>
+                </a:cxn>
+                <a:cxn ang="0">
+                  <a:pos x="csX8" y="csY8"/>
+                </a:cxn>
+                <a:cxn ang="0">
+                  <a:pos x="csX9" y="csY9"/>
+                </a:cxn>
+                <a:cxn ang="0">
+                  <a:pos x="csX10" y="csY10"/>
+                </a:cxn>
+                <a:cxn ang="0">
+                  <a:pos x="csX11" y="csY11"/>
+                </a:cxn>
+                <a:cxn ang="0">
+                  <a:pos x="csX12" y="csY12"/>
+                </a:cxn>
+                <a:cxn ang="0">
+                  <a:pos x="csX13" y="csY13"/>
+                </a:cxn>
+                <a:cxn ang="0">
+                  <a:pos x="csX14" y="csY14"/>
+                </a:cxn>
+                <a:cxn ang="0">
+                  <a:pos x="csX15" y="csY15"/>
+                </a:cxn>
+              </a:cxnLst>
+              <a:rect l="l" t="t" r="r" b="b"/>
+              <a:pathLst>
+                <a:path w="724109" h="724109">
+                  <a:moveTo>
+                    <a:pt x="362160" y="0"/>
+                  </a:moveTo>
+                  <a:cubicBezTo>
+                    <a:pt x="162202" y="-58"/>
+                    <a:pt x="58" y="161993"/>
+                    <a:pt x="0" y="361950"/>
+                  </a:cubicBezTo>
+                  <a:cubicBezTo>
+                    <a:pt x="-58" y="561907"/>
+                    <a:pt x="161993" y="724052"/>
+                    <a:pt x="361950" y="724110"/>
+                  </a:cubicBezTo>
+                  <a:cubicBezTo>
+                    <a:pt x="561907" y="724168"/>
+                    <a:pt x="724051" y="562117"/>
+                    <a:pt x="724110" y="362160"/>
+                  </a:cubicBezTo>
+                  <a:cubicBezTo>
+                    <a:pt x="724110" y="362124"/>
+                    <a:pt x="724110" y="362090"/>
+                    <a:pt x="724110" y="362055"/>
+                  </a:cubicBezTo>
+                  <a:cubicBezTo>
+                    <a:pt x="724220" y="162208"/>
+                    <a:pt x="562302" y="111"/>
+                    <a:pt x="362455" y="0"/>
+                  </a:cubicBezTo>
+                  <a:cubicBezTo>
+                    <a:pt x="362357" y="0"/>
+                    <a:pt x="362258" y="0"/>
+                    <a:pt x="362160" y="0"/>
+                  </a:cubicBezTo>
+                  <a:close/>
+                  <a:moveTo>
+                    <a:pt x="362160" y="705050"/>
+                  </a:moveTo>
+                  <a:cubicBezTo>
+                    <a:pt x="172865" y="705135"/>
+                    <a:pt x="19343" y="551750"/>
+                    <a:pt x="19260" y="362455"/>
+                  </a:cubicBezTo>
+                  <a:cubicBezTo>
+                    <a:pt x="19221" y="274663"/>
+                    <a:pt x="52870" y="190204"/>
+                    <a:pt x="113271" y="126492"/>
+                  </a:cubicBezTo>
+                  <a:lnTo>
+                    <a:pt x="597741" y="610962"/>
+                  </a:lnTo>
+                  <a:cubicBezTo>
+                    <a:pt x="534204" y="671404"/>
+                    <a:pt x="449853" y="705092"/>
+                    <a:pt x="362160" y="705050"/>
+                  </a:cubicBezTo>
+                  <a:close/>
+                  <a:moveTo>
+                    <a:pt x="611200" y="597494"/>
+                  </a:moveTo>
+                  <a:lnTo>
+                    <a:pt x="126740" y="113024"/>
+                  </a:lnTo>
+                  <a:cubicBezTo>
+                    <a:pt x="264089" y="-17189"/>
+                    <a:pt x="480992" y="-11404"/>
+                    <a:pt x="611205" y="125945"/>
+                  </a:cubicBezTo>
+                  <a:cubicBezTo>
+                    <a:pt x="736536" y="258146"/>
+                    <a:pt x="736534" y="465296"/>
+                    <a:pt x="611200" y="597494"/>
+                  </a:cubicBezTo>
+                  <a:close/>
+                </a:path>
+              </a:pathLst>
+            </a:custGeom>
+            <a:solidFill>
+              <a:srgbClr val="000000"/>
+            </a:solidFill>
+            <a:ln w="9525" cap="flat">
+              <a:noFill/>
+              <a:prstDash val="solid"/>
+              <a:miter/>
+            </a:ln>
+          </p:spPr>
+          <p:txBody>
+            <a:bodyPr/>
+            <a:lstStyle/>
+            <a:p>
+              <a:endParaRPr lang="en-US"/>
+            </a:p>
+          </p:txBody>
+        </p:sp>
+      </p:grpSp>
+      <p:grpSp>
+        <p:nvGrpSpPr>
+          <p:cNvPr id="39" name="Group 38">
+            <a:extLst>
+              <a:ext uri="{FF2B5EF4-FFF2-40B4-BE49-F238E27FC236}">
+                <a16:creationId xmlns:a16="http://schemas.microsoft.com/office/drawing/2014/main" id="{51FC063D-7D38-B921-2C5B-1F750893372C}"/>
+              </a:ext>
+            </a:extLst>
+          </p:cNvPr>
+          <p:cNvGrpSpPr/>
+          <p:nvPr/>
+        </p:nvGrpSpPr>
+        <p:grpSpPr>
+          <a:xfrm>
+            <a:off x="4889164" y="4595993"/>
+            <a:ext cx="724109" cy="724109"/>
+            <a:chOff x="1699051" y="3774248"/>
+            <a:chExt cx="724109" cy="724109"/>
+          </a:xfrm>
+        </p:grpSpPr>
+        <p:pic>
+          <p:nvPicPr>
+            <p:cNvPr id="24" name="Graphic 23" descr="Family with two children outline">
+              <a:extLst>
+                <a:ext uri="{FF2B5EF4-FFF2-40B4-BE49-F238E27FC236}">
+                  <a16:creationId xmlns:a16="http://schemas.microsoft.com/office/drawing/2014/main" id="{1C85D68A-351D-9D31-735E-405E8B364A29}"/>
+                </a:ext>
+              </a:extLst>
+            </p:cNvPr>
+            <p:cNvPicPr>
+              <a:picLocks noChangeAspect="1"/>
+            </p:cNvPicPr>
+            <p:nvPr/>
+          </p:nvPicPr>
+          <p:blipFill>
+            <a:blip>
+              <a:extLst>
+                <a:ext uri="{96DAC541-7B7A-43D3-8B79-37D633B846F1}">
+                  <asvg:svgBlip xmlns:asvg="http://schemas.microsoft.com/office/drawing/2016/SVG/main" r:embed="rId7"/>
+                </a:ext>
+              </a:extLst>
+            </a:blip>
+            <a:stretch>
+              <a:fillRect/>
+            </a:stretch>
+          </p:blipFill>
+          <p:spPr>
+            <a:xfrm>
+              <a:off x="1772649" y="3847846"/>
+              <a:ext cx="576912" cy="576912"/>
+            </a:xfrm>
+            <a:prstGeom prst="rect">
+              <a:avLst/>
+            </a:prstGeom>
+          </p:spPr>
+        </p:pic>
+        <p:sp>
+          <p:nvSpPr>
+            <p:cNvPr id="34" name="Freeform 33">
+              <a:extLst>
+                <a:ext uri="{FF2B5EF4-FFF2-40B4-BE49-F238E27FC236}">
+                  <a16:creationId xmlns:a16="http://schemas.microsoft.com/office/drawing/2014/main" id="{1F0885B3-B1D4-4153-2391-6C031D938A15}"/>
+                </a:ext>
+              </a:extLst>
+            </p:cNvPr>
+            <p:cNvSpPr/>
+            <p:nvPr/>
+          </p:nvSpPr>
+          <p:spPr>
+            <a:xfrm>
+              <a:off x="1699051" y="3774248"/>
+              <a:ext cx="724109" cy="724109"/>
+            </a:xfrm>
+            <a:custGeom>
+              <a:avLst/>
+              <a:gdLst>
+                <a:gd name="csX0" fmla="*/ 362160 w 724109"/>
+                <a:gd name="csY0" fmla="*/ 0 h 724109"/>
+                <a:gd name="csX1" fmla="*/ 0 w 724109"/>
+                <a:gd name="csY1" fmla="*/ 361950 h 724109"/>
+                <a:gd name="csX2" fmla="*/ 361950 w 724109"/>
+                <a:gd name="csY2" fmla="*/ 724110 h 724109"/>
+                <a:gd name="csX3" fmla="*/ 724110 w 724109"/>
+                <a:gd name="csY3" fmla="*/ 362160 h 724109"/>
+                <a:gd name="csX4" fmla="*/ 724110 w 724109"/>
+                <a:gd name="csY4" fmla="*/ 362055 h 724109"/>
+                <a:gd name="csX5" fmla="*/ 362455 w 724109"/>
+                <a:gd name="csY5" fmla="*/ 0 h 724109"/>
+                <a:gd name="csX6" fmla="*/ 362160 w 724109"/>
+                <a:gd name="csY6" fmla="*/ 0 h 724109"/>
+                <a:gd name="csX7" fmla="*/ 362160 w 724109"/>
+                <a:gd name="csY7" fmla="*/ 705050 h 724109"/>
+                <a:gd name="csX8" fmla="*/ 19260 w 724109"/>
+                <a:gd name="csY8" fmla="*/ 362455 h 724109"/>
+                <a:gd name="csX9" fmla="*/ 113271 w 724109"/>
+                <a:gd name="csY9" fmla="*/ 126492 h 724109"/>
+                <a:gd name="csX10" fmla="*/ 597741 w 724109"/>
+                <a:gd name="csY10" fmla="*/ 610962 h 724109"/>
+                <a:gd name="csX11" fmla="*/ 362160 w 724109"/>
+                <a:gd name="csY11" fmla="*/ 705050 h 724109"/>
+                <a:gd name="csX12" fmla="*/ 611200 w 724109"/>
+                <a:gd name="csY12" fmla="*/ 597494 h 724109"/>
+                <a:gd name="csX13" fmla="*/ 126740 w 724109"/>
+                <a:gd name="csY13" fmla="*/ 113024 h 724109"/>
+                <a:gd name="csX14" fmla="*/ 611205 w 724109"/>
+                <a:gd name="csY14" fmla="*/ 125945 h 724109"/>
+                <a:gd name="csX15" fmla="*/ 611200 w 724109"/>
+                <a:gd name="csY15" fmla="*/ 597494 h 724109"/>
+              </a:gdLst>
+              <a:ahLst/>
+              <a:cxnLst>
+                <a:cxn ang="0">
+                  <a:pos x="csX0" y="csY0"/>
+                </a:cxn>
+                <a:cxn ang="0">
+                  <a:pos x="csX1" y="csY1"/>
+                </a:cxn>
+                <a:cxn ang="0">
+                  <a:pos x="csX2" y="csY2"/>
+                </a:cxn>
+                <a:cxn ang="0">
+                  <a:pos x="csX3" y="csY3"/>
+                </a:cxn>
+                <a:cxn ang="0">
+                  <a:pos x="csX4" y="csY4"/>
+                </a:cxn>
+                <a:cxn ang="0">
+                  <a:pos x="csX5" y="csY5"/>
+                </a:cxn>
+                <a:cxn ang="0">
+                  <a:pos x="csX6" y="csY6"/>
+                </a:cxn>
+                <a:cxn ang="0">
+                  <a:pos x="csX7" y="csY7"/>
+                </a:cxn>
+                <a:cxn ang="0">
+                  <a:pos x="csX8" y="csY8"/>
+                </a:cxn>
+                <a:cxn ang="0">
+                  <a:pos x="csX9" y="csY9"/>
+                </a:cxn>
+                <a:cxn ang="0">
+                  <a:pos x="csX10" y="csY10"/>
+                </a:cxn>
+                <a:cxn ang="0">
+                  <a:pos x="csX11" y="csY11"/>
+                </a:cxn>
+                <a:cxn ang="0">
+                  <a:pos x="csX12" y="csY12"/>
+                </a:cxn>
+                <a:cxn ang="0">
+                  <a:pos x="csX13" y="csY13"/>
+                </a:cxn>
+                <a:cxn ang="0">
+                  <a:pos x="csX14" y="csY14"/>
+                </a:cxn>
+                <a:cxn ang="0">
+                  <a:pos x="csX15" y="csY15"/>
+                </a:cxn>
+              </a:cxnLst>
+              <a:rect l="l" t="t" r="r" b="b"/>
+              <a:pathLst>
+                <a:path w="724109" h="724109">
+                  <a:moveTo>
+                    <a:pt x="362160" y="0"/>
+                  </a:moveTo>
+                  <a:cubicBezTo>
+                    <a:pt x="162202" y="-58"/>
+                    <a:pt x="58" y="161993"/>
+                    <a:pt x="0" y="361950"/>
+                  </a:cubicBezTo>
+                  <a:cubicBezTo>
+                    <a:pt x="-58" y="561907"/>
+                    <a:pt x="161993" y="724052"/>
+                    <a:pt x="361950" y="724110"/>
+                  </a:cubicBezTo>
+                  <a:cubicBezTo>
+                    <a:pt x="561907" y="724168"/>
+                    <a:pt x="724051" y="562117"/>
+                    <a:pt x="724110" y="362160"/>
+                  </a:cubicBezTo>
+                  <a:cubicBezTo>
+                    <a:pt x="724110" y="362124"/>
+                    <a:pt x="724110" y="362090"/>
+                    <a:pt x="724110" y="362055"/>
+                  </a:cubicBezTo>
+                  <a:cubicBezTo>
+                    <a:pt x="724220" y="162208"/>
+                    <a:pt x="562302" y="111"/>
+                    <a:pt x="362455" y="0"/>
+                  </a:cubicBezTo>
+                  <a:cubicBezTo>
+                    <a:pt x="362357" y="0"/>
+                    <a:pt x="362258" y="0"/>
+                    <a:pt x="362160" y="0"/>
+                  </a:cubicBezTo>
+                  <a:close/>
+                  <a:moveTo>
+                    <a:pt x="362160" y="705050"/>
+                  </a:moveTo>
+                  <a:cubicBezTo>
+                    <a:pt x="172865" y="705135"/>
+                    <a:pt x="19343" y="551750"/>
+                    <a:pt x="19260" y="362455"/>
+                  </a:cubicBezTo>
+                  <a:cubicBezTo>
+                    <a:pt x="19221" y="274663"/>
+                    <a:pt x="52870" y="190204"/>
+                    <a:pt x="113271" y="126492"/>
+                  </a:cubicBezTo>
+                  <a:lnTo>
+                    <a:pt x="597741" y="610962"/>
+                  </a:lnTo>
+                  <a:cubicBezTo>
+                    <a:pt x="534204" y="671404"/>
+                    <a:pt x="449853" y="705092"/>
+                    <a:pt x="362160" y="705050"/>
+                  </a:cubicBezTo>
+                  <a:close/>
+                  <a:moveTo>
+                    <a:pt x="611200" y="597494"/>
+                  </a:moveTo>
+                  <a:lnTo>
+                    <a:pt x="126740" y="113024"/>
+                  </a:lnTo>
+                  <a:cubicBezTo>
+                    <a:pt x="264089" y="-17189"/>
+                    <a:pt x="480992" y="-11404"/>
+                    <a:pt x="611205" y="125945"/>
+                  </a:cubicBezTo>
+                  <a:cubicBezTo>
+                    <a:pt x="736536" y="258146"/>
+                    <a:pt x="736534" y="465296"/>
+                    <a:pt x="611200" y="597494"/>
+                  </a:cubicBezTo>
+                  <a:close/>
+                </a:path>
+              </a:pathLst>
+            </a:custGeom>
+            <a:solidFill>
+              <a:srgbClr val="000000"/>
+            </a:solidFill>
+            <a:ln w="9525" cap="flat">
+              <a:noFill/>
+              <a:prstDash val="solid"/>
+              <a:miter/>
+            </a:ln>
+          </p:spPr>
+          <p:txBody>
+            <a:bodyPr/>
+            <a:lstStyle/>
+            <a:p>
+              <a:endParaRPr lang="en-US"/>
+            </a:p>
+          </p:txBody>
+        </p:sp>
+      </p:grpSp>
+      <p:grpSp>
+        <p:nvGrpSpPr>
+          <p:cNvPr id="38" name="Group 37">
+            <a:extLst>
+              <a:ext uri="{FF2B5EF4-FFF2-40B4-BE49-F238E27FC236}">
+                <a16:creationId xmlns:a16="http://schemas.microsoft.com/office/drawing/2014/main" id="{88108302-5B81-6271-74C7-163AB4F9E895}"/>
+              </a:ext>
+            </a:extLst>
+          </p:cNvPr>
+          <p:cNvGrpSpPr/>
+          <p:nvPr/>
+        </p:nvGrpSpPr>
+        <p:grpSpPr>
+          <a:xfrm>
+            <a:off x="3722542" y="3906268"/>
+            <a:ext cx="724109" cy="724109"/>
+            <a:chOff x="4731707" y="5050322"/>
+            <a:chExt cx="724109" cy="724109"/>
+          </a:xfrm>
+        </p:grpSpPr>
+        <p:pic>
+          <p:nvPicPr>
+            <p:cNvPr id="36" name="Graphic 35" descr="Scale outline">
+              <a:extLst>
+                <a:ext uri="{FF2B5EF4-FFF2-40B4-BE49-F238E27FC236}">
+                  <a16:creationId xmlns:a16="http://schemas.microsoft.com/office/drawing/2014/main" id="{681E78BE-1D51-4413-5F03-51C145BAA5DF}"/>
+                </a:ext>
+              </a:extLst>
+            </p:cNvPr>
+            <p:cNvPicPr>
+              <a:picLocks noChangeAspect="1"/>
+            </p:cNvPicPr>
+            <p:nvPr/>
+          </p:nvPicPr>
+          <p:blipFill>
+            <a:blip>
+              <a:extLst>
+                <a:ext uri="{96DAC541-7B7A-43D3-8B79-37D633B846F1}">
+                  <asvg:svgBlip xmlns:asvg="http://schemas.microsoft.com/office/drawing/2016/SVG/main" r:embed="rId8"/>
+                </a:ext>
+              </a:extLst>
+            </a:blip>
+            <a:stretch>
+              <a:fillRect/>
+            </a:stretch>
+          </p:blipFill>
+          <p:spPr>
+            <a:xfrm>
+              <a:off x="4785403" y="5104018"/>
+              <a:ext cx="616716" cy="616716"/>
+            </a:xfrm>
+            <a:prstGeom prst="rect">
+              <a:avLst/>
+            </a:prstGeom>
+          </p:spPr>
+        </p:pic>
+        <p:sp>
+          <p:nvSpPr>
+            <p:cNvPr id="37" name="Freeform 36">
+              <a:extLst>
+                <a:ext uri="{FF2B5EF4-FFF2-40B4-BE49-F238E27FC236}">
+                  <a16:creationId xmlns:a16="http://schemas.microsoft.com/office/drawing/2014/main" id="{7C1FE35B-CE1A-E912-6987-A607C458B82A}"/>
+                </a:ext>
+              </a:extLst>
+            </p:cNvPr>
+            <p:cNvSpPr/>
+            <p:nvPr/>
+          </p:nvSpPr>
+          <p:spPr>
+            <a:xfrm>
+              <a:off x="4731707" y="5050322"/>
+              <a:ext cx="724109" cy="724109"/>
+            </a:xfrm>
+            <a:custGeom>
+              <a:avLst/>
+              <a:gdLst>
+                <a:gd name="csX0" fmla="*/ 362160 w 724109"/>
+                <a:gd name="csY0" fmla="*/ 0 h 724109"/>
+                <a:gd name="csX1" fmla="*/ 0 w 724109"/>
+                <a:gd name="csY1" fmla="*/ 361950 h 724109"/>
+                <a:gd name="csX2" fmla="*/ 361950 w 724109"/>
+                <a:gd name="csY2" fmla="*/ 724110 h 724109"/>
+                <a:gd name="csX3" fmla="*/ 724110 w 724109"/>
+                <a:gd name="csY3" fmla="*/ 362160 h 724109"/>
+                <a:gd name="csX4" fmla="*/ 724110 w 724109"/>
+                <a:gd name="csY4" fmla="*/ 362055 h 724109"/>
+                <a:gd name="csX5" fmla="*/ 362455 w 724109"/>
+                <a:gd name="csY5" fmla="*/ 0 h 724109"/>
+                <a:gd name="csX6" fmla="*/ 362160 w 724109"/>
+                <a:gd name="csY6" fmla="*/ 0 h 724109"/>
+                <a:gd name="csX7" fmla="*/ 362160 w 724109"/>
+                <a:gd name="csY7" fmla="*/ 705050 h 724109"/>
+                <a:gd name="csX8" fmla="*/ 19260 w 724109"/>
+                <a:gd name="csY8" fmla="*/ 362455 h 724109"/>
+                <a:gd name="csX9" fmla="*/ 113271 w 724109"/>
+                <a:gd name="csY9" fmla="*/ 126492 h 724109"/>
+                <a:gd name="csX10" fmla="*/ 597741 w 724109"/>
+                <a:gd name="csY10" fmla="*/ 610962 h 724109"/>
+                <a:gd name="csX11" fmla="*/ 362160 w 724109"/>
+                <a:gd name="csY11" fmla="*/ 705050 h 724109"/>
+                <a:gd name="csX12" fmla="*/ 611200 w 724109"/>
+                <a:gd name="csY12" fmla="*/ 597494 h 724109"/>
+                <a:gd name="csX13" fmla="*/ 126740 w 724109"/>
+                <a:gd name="csY13" fmla="*/ 113024 h 724109"/>
+                <a:gd name="csX14" fmla="*/ 611205 w 724109"/>
+                <a:gd name="csY14" fmla="*/ 125945 h 724109"/>
+                <a:gd name="csX15" fmla="*/ 611200 w 724109"/>
+                <a:gd name="csY15" fmla="*/ 597494 h 724109"/>
+              </a:gdLst>
+              <a:ahLst/>
+              <a:cxnLst>
+                <a:cxn ang="0">
+                  <a:pos x="csX0" y="csY0"/>
+                </a:cxn>
+                <a:cxn ang="0">
+                  <a:pos x="csX1" y="csY1"/>
+                </a:cxn>
+                <a:cxn ang="0">
+                  <a:pos x="csX2" y="csY2"/>
+                </a:cxn>
+                <a:cxn ang="0">
+                  <a:pos x="csX3" y="csY3"/>
+                </a:cxn>
+                <a:cxn ang="0">
+                  <a:pos x="csX4" y="csY4"/>
+                </a:cxn>
+                <a:cxn ang="0">
+                  <a:pos x="csX5" y="csY5"/>
+                </a:cxn>
+                <a:cxn ang="0">
+                  <a:pos x="csX6" y="csY6"/>
+                </a:cxn>
+                <a:cxn ang="0">
+                  <a:pos x="csX7" y="csY7"/>
+                </a:cxn>
+                <a:cxn ang="0">
+                  <a:pos x="csX8" y="csY8"/>
+                </a:cxn>
+                <a:cxn ang="0">
+                  <a:pos x="csX9" y="csY9"/>
+                </a:cxn>
+                <a:cxn ang="0">
+                  <a:pos x="csX10" y="csY10"/>
+                </a:cxn>
+                <a:cxn ang="0">
+                  <a:pos x="csX11" y="csY11"/>
+                </a:cxn>
+                <a:cxn ang="0">
+                  <a:pos x="csX12" y="csY12"/>
+                </a:cxn>
+                <a:cxn ang="0">
+                  <a:pos x="csX13" y="csY13"/>
+                </a:cxn>
+                <a:cxn ang="0">
+                  <a:pos x="csX14" y="csY14"/>
+                </a:cxn>
+                <a:cxn ang="0">
+                  <a:pos x="csX15" y="csY15"/>
+                </a:cxn>
+              </a:cxnLst>
+              <a:rect l="l" t="t" r="r" b="b"/>
+              <a:pathLst>
+                <a:path w="724109" h="724109">
+                  <a:moveTo>
+                    <a:pt x="362160" y="0"/>
+                  </a:moveTo>
+                  <a:cubicBezTo>
+                    <a:pt x="162202" y="-58"/>
+                    <a:pt x="58" y="161993"/>
+                    <a:pt x="0" y="361950"/>
+                  </a:cubicBezTo>
+                  <a:cubicBezTo>
+                    <a:pt x="-58" y="561907"/>
+                    <a:pt x="161993" y="724052"/>
+                    <a:pt x="361950" y="724110"/>
+                  </a:cubicBezTo>
+                  <a:cubicBezTo>
+                    <a:pt x="561907" y="724168"/>
+                    <a:pt x="724051" y="562117"/>
+                    <a:pt x="724110" y="362160"/>
+                  </a:cubicBezTo>
+                  <a:cubicBezTo>
+                    <a:pt x="724110" y="362124"/>
+                    <a:pt x="724110" y="362090"/>
+                    <a:pt x="724110" y="362055"/>
+                  </a:cubicBezTo>
+                  <a:cubicBezTo>
+                    <a:pt x="724220" y="162208"/>
+                    <a:pt x="562302" y="111"/>
+                    <a:pt x="362455" y="0"/>
+                  </a:cubicBezTo>
+                  <a:cubicBezTo>
+                    <a:pt x="362357" y="0"/>
+                    <a:pt x="362258" y="0"/>
+                    <a:pt x="362160" y="0"/>
+                  </a:cubicBezTo>
+                  <a:close/>
+                  <a:moveTo>
+                    <a:pt x="362160" y="705050"/>
+                  </a:moveTo>
+                  <a:cubicBezTo>
+                    <a:pt x="172865" y="705135"/>
+                    <a:pt x="19343" y="551750"/>
+                    <a:pt x="19260" y="362455"/>
+                  </a:cubicBezTo>
+                  <a:cubicBezTo>
+                    <a:pt x="19221" y="274663"/>
+                    <a:pt x="52870" y="190204"/>
+                    <a:pt x="113271" y="126492"/>
+                  </a:cubicBezTo>
+                  <a:lnTo>
+                    <a:pt x="597741" y="610962"/>
+                  </a:lnTo>
+                  <a:cubicBezTo>
+                    <a:pt x="534204" y="671404"/>
+                    <a:pt x="449853" y="705092"/>
+                    <a:pt x="362160" y="705050"/>
+                  </a:cubicBezTo>
+                  <a:close/>
+                  <a:moveTo>
+                    <a:pt x="611200" y="597494"/>
+                  </a:moveTo>
+                  <a:lnTo>
+                    <a:pt x="126740" y="113024"/>
+                  </a:lnTo>
+                  <a:cubicBezTo>
+                    <a:pt x="264089" y="-17189"/>
+                    <a:pt x="480992" y="-11404"/>
+                    <a:pt x="611205" y="125945"/>
+                  </a:cubicBezTo>
+                  <a:cubicBezTo>
+                    <a:pt x="736536" y="258146"/>
+                    <a:pt x="736534" y="465296"/>
+                    <a:pt x="611200" y="597494"/>
+                  </a:cubicBezTo>
+                  <a:close/>
+                </a:path>
+              </a:pathLst>
+            </a:custGeom>
+            <a:solidFill>
+              <a:srgbClr val="000000"/>
+            </a:solidFill>
+            <a:ln w="9525" cap="flat">
+              <a:noFill/>
+              <a:prstDash val="solid"/>
+              <a:miter/>
+            </a:ln>
+          </p:spPr>
+          <p:txBody>
+            <a:bodyPr/>
+            <a:lstStyle/>
+            <a:p>
+              <a:endParaRPr lang="en-US"/>
+            </a:p>
+          </p:txBody>
+        </p:sp>
+      </p:grpSp>
     </p:spTree>
     <p:extLst>
       <p:ext uri="{BB962C8B-B14F-4D97-AF65-F5344CB8AC3E}">

--- a/Executive_Summary/Project1_Insurance_Presentation.pptx
+++ b/Executive_Summary/Project1_Insurance_Presentation.pptx
@@ -1321,7 +1321,7 @@
             </a:pPr>
             <a:r>
               <a:rPr lang="en-US" sz="1200" dirty="0"/>
-              <a:t>1,337 records were examined, after dropping one exact duplicate. Smokers are 20.5 percent. Their average charges are higher than the median so smokers are not right-skewed. The remaining non-smokers have higher average than median which presents a right skewed distribution for the sample. For this reason, we consider both mean and median in our analysis. </a:t>
+              <a:t>1,337 records were examined, after dropping one exact duplicate. Smokers are 20.5 percent. Their median charges are higher than the average so smokers are not right-skewed. The remaining non-smokers have higher average than median which presents a right skewed distribution for the sample. For this reason, we consider both mean and median in our analysis. </a:t>
             </a:r>
           </a:p>
           <a:p>
@@ -3019,7 +3019,7 @@
                 <a:ea typeface="Calibri" pitchFamily="34" charset="-122"/>
                 <a:cs typeface="Calibri" pitchFamily="34" charset="-120"/>
               </a:rPr>
-              <a:t>11  /  15</a:t>
+              <a:t>10  /  15</a:t>
             </a:r>
             <a:endParaRPr lang="en-US" sz="1000" dirty="0"/>
           </a:p>
@@ -3840,7 +3840,7 @@
                 <a:ea typeface="Calibri" pitchFamily="34" charset="-122"/>
                 <a:cs typeface="Calibri" pitchFamily="34" charset="-120"/>
               </a:rPr>
-              <a:t>13  /  15</a:t>
+              <a:t>12  /  15</a:t>
             </a:r>
             <a:endParaRPr lang="en-US" sz="1000" dirty="0"/>
           </a:p>
@@ -4647,7 +4647,7 @@
                 <a:ea typeface="Calibri" pitchFamily="34" charset="-122"/>
                 <a:cs typeface="Calibri" pitchFamily="34" charset="-120"/>
               </a:rPr>
-              <a:t>14  /  15</a:t>
+              <a:t>13 /  15</a:t>
             </a:r>
             <a:endParaRPr lang="en-US" sz="1000" dirty="0"/>
           </a:p>
@@ -4698,425 +4698,6 @@
           <a:chExt cx="0" cy="0"/>
         </a:xfrm>
       </p:grpSpPr>
-      <p:sp>
-        <p:nvSpPr>
-          <p:cNvPr id="2" name="Text 0"/>
-          <p:cNvSpPr/>
-          <p:nvPr/>
-        </p:nvSpPr>
-        <p:spPr>
-          <a:xfrm>
-            <a:off x="502920" y="256032"/>
-            <a:ext cx="3840480" cy="256032"/>
-          </a:xfrm>
-          <a:prstGeom prst="rect">
-            <a:avLst/>
-          </a:prstGeom>
-          <a:noFill/>
-          <a:ln/>
-        </p:spPr>
-        <p:txBody>
-          <a:bodyPr wrap="square" lIns="0" tIns="0" rIns="0" bIns="0" rtlCol="0" anchor="ctr"/>
-          <a:lstStyle/>
-          <a:p>
-            <a:pPr marL="0" indent="0">
-              <a:buNone/>
-            </a:pPr>
-            <a:r>
-              <a:rPr lang="en-US" sz="1100" b="1" kern="0" spc="160" dirty="0">
-                <a:solidFill>
-                  <a:srgbClr val="1C2A22"/>
-                </a:solidFill>
-                <a:latin typeface="Calibri" pitchFamily="34" charset="0"/>
-                <a:ea typeface="Calibri" pitchFamily="34" charset="-122"/>
-                <a:cs typeface="Calibri" pitchFamily="34" charset="-120"/>
-              </a:rPr>
-              <a:t>POWELL   ·   BUI</a:t>
-            </a:r>
-            <a:endParaRPr lang="en-US" sz="1100" dirty="0"/>
-          </a:p>
-        </p:txBody>
-      </p:sp>
-      <p:sp>
-        <p:nvSpPr>
-          <p:cNvPr id="3" name="Text 1"/>
-          <p:cNvSpPr/>
-          <p:nvPr/>
-        </p:nvSpPr>
-        <p:spPr>
-          <a:xfrm>
-            <a:off x="6675120" y="256032"/>
-            <a:ext cx="5029200" cy="256032"/>
-          </a:xfrm>
-          <a:prstGeom prst="rect">
-            <a:avLst/>
-          </a:prstGeom>
-          <a:noFill/>
-          <a:ln/>
-        </p:spPr>
-        <p:txBody>
-          <a:bodyPr wrap="square" lIns="0" tIns="0" rIns="0" bIns="0" rtlCol="0" anchor="ctr"/>
-          <a:lstStyle/>
-          <a:p>
-            <a:pPr marL="0" indent="0" algn="r">
-              <a:buNone/>
-            </a:pPr>
-            <a:r>
-              <a:rPr lang="en-US" sz="1100" kern="0" spc="140" dirty="0">
-                <a:solidFill>
-                  <a:srgbClr val="5F7265"/>
-                </a:solidFill>
-                <a:latin typeface="Calibri" pitchFamily="34" charset="0"/>
-                <a:ea typeface="Calibri" pitchFamily="34" charset="-122"/>
-                <a:cs typeface="Calibri" pitchFamily="34" charset="-120"/>
-              </a:rPr>
-              <a:t>THE EQUATION</a:t>
-            </a:r>
-            <a:endParaRPr lang="en-US" sz="1100" dirty="0"/>
-          </a:p>
-        </p:txBody>
-      </p:sp>
-      <p:sp>
-        <p:nvSpPr>
-          <p:cNvPr id="4" name="Text 2"/>
-          <p:cNvSpPr/>
-          <p:nvPr/>
-        </p:nvSpPr>
-        <p:spPr>
-          <a:xfrm>
-            <a:off x="502920" y="685800"/>
-            <a:ext cx="10972800" cy="411480"/>
-          </a:xfrm>
-          <a:prstGeom prst="rect">
-            <a:avLst/>
-          </a:prstGeom>
-          <a:noFill/>
-          <a:ln/>
-        </p:spPr>
-        <p:txBody>
-          <a:bodyPr wrap="square" lIns="0" tIns="0" rIns="0" bIns="0" rtlCol="0" anchor="ctr"/>
-          <a:lstStyle/>
-          <a:p>
-            <a:pPr marL="0" indent="0">
-              <a:buNone/>
-            </a:pPr>
-            <a:r>
-              <a:rPr lang="en-US" sz="2800" dirty="0">
-                <a:solidFill>
-                  <a:srgbClr val="1C2A22"/>
-                </a:solidFill>
-                <a:latin typeface="Georgia" pitchFamily="34" charset="0"/>
-                <a:ea typeface="Georgia" pitchFamily="34" charset="-122"/>
-                <a:cs typeface="Georgia" pitchFamily="34" charset="-120"/>
-              </a:rPr>
-              <a:t>Detailed Insights</a:t>
-            </a:r>
-            <a:endParaRPr lang="en-US" sz="2800" dirty="0"/>
-          </a:p>
-        </p:txBody>
-      </p:sp>
-      <p:sp>
-        <p:nvSpPr>
-          <p:cNvPr id="5" name="Shape 3"/>
-          <p:cNvSpPr/>
-          <p:nvPr/>
-        </p:nvSpPr>
-        <p:spPr>
-          <a:xfrm>
-            <a:off x="502920" y="1325880"/>
-            <a:ext cx="11155680" cy="1965960"/>
-          </a:xfrm>
-          <a:prstGeom prst="rect">
-            <a:avLst/>
-          </a:prstGeom>
-          <a:solidFill>
-            <a:srgbClr val="F7F1E2"/>
-          </a:solidFill>
-          <a:ln/>
-          <a:effectLst>
-            <a:outerShdw blurRad="50800" dist="38100" dir="8100000" algn="tr" rotWithShape="0">
-              <a:prstClr val="black">
-                <a:alpha val="40000"/>
-              </a:prstClr>
-            </a:outerShdw>
-          </a:effectLst>
-        </p:spPr>
-        <p:txBody>
-          <a:bodyPr/>
-          <a:lstStyle/>
-          <a:p>
-            <a:endParaRPr lang="en-US"/>
-          </a:p>
-        </p:txBody>
-      </p:sp>
-      <p:sp>
-        <p:nvSpPr>
-          <p:cNvPr id="6" name="Text 4"/>
-          <p:cNvSpPr/>
-          <p:nvPr/>
-        </p:nvSpPr>
-        <p:spPr>
-          <a:xfrm>
-            <a:off x="731520" y="1463040"/>
-            <a:ext cx="1828800" cy="256032"/>
-          </a:xfrm>
-          <a:prstGeom prst="rect">
-            <a:avLst/>
-          </a:prstGeom>
-          <a:noFill/>
-          <a:ln/>
-        </p:spPr>
-        <p:txBody>
-          <a:bodyPr wrap="square" lIns="0" tIns="0" rIns="0" bIns="0" rtlCol="0" anchor="ctr"/>
-          <a:lstStyle/>
-          <a:p>
-            <a:pPr marL="0" indent="0">
-              <a:buNone/>
-            </a:pPr>
-            <a:r>
-              <a:rPr lang="en-US" sz="1200" b="1" kern="0" spc="140" dirty="0">
-                <a:solidFill>
-                  <a:srgbClr val="9D7D3B"/>
-                </a:solidFill>
-                <a:latin typeface="Calibri" pitchFamily="34" charset="0"/>
-                <a:ea typeface="Calibri" pitchFamily="34" charset="-122"/>
-                <a:cs typeface="Calibri" pitchFamily="34" charset="-120"/>
-              </a:rPr>
-              <a:t>AGE</a:t>
-            </a:r>
-            <a:endParaRPr lang="en-US" sz="1200" dirty="0"/>
-          </a:p>
-        </p:txBody>
-      </p:sp>
-      <p:sp>
-        <p:nvSpPr>
-          <p:cNvPr id="7" name="Text 5"/>
-          <p:cNvSpPr/>
-          <p:nvPr/>
-        </p:nvSpPr>
-        <p:spPr>
-          <a:xfrm>
-            <a:off x="731520" y="1783080"/>
-            <a:ext cx="10607040" cy="1280160"/>
-          </a:xfrm>
-          <a:prstGeom prst="rect">
-            <a:avLst/>
-          </a:prstGeom>
-          <a:noFill/>
-          <a:ln/>
-        </p:spPr>
-        <p:txBody>
-          <a:bodyPr wrap="square" lIns="0" tIns="0" rIns="0" bIns="0" rtlCol="0" anchor="ctr"/>
-          <a:lstStyle/>
-          <a:p>
-            <a:pPr marL="0" indent="0">
-              <a:buNone/>
-            </a:pPr>
-            <a:r>
-              <a:rPr lang="en-US" sz="1600" dirty="0">
-                <a:solidFill>
-                  <a:srgbClr val="1C2A22"/>
-                </a:solidFill>
-                <a:latin typeface="Calibri" pitchFamily="34" charset="0"/>
-                <a:ea typeface="Calibri" pitchFamily="34" charset="-122"/>
-                <a:cs typeface="Calibri" pitchFamily="34" charset="-120"/>
-              </a:rPr>
-              <a:t>Holding BMI, smoking, children, and region fixed, one more year of age is associated with $264 higher mean charges. Ordinary 95% interval $245 to $283. The paired bootstrap interval is the same. About 2% of the average bill. Same slope in both groups.</a:t>
-            </a:r>
-            <a:endParaRPr lang="en-US" sz="1600" dirty="0"/>
-          </a:p>
-        </p:txBody>
-      </p:sp>
-      <p:sp>
-        <p:nvSpPr>
-          <p:cNvPr id="8" name="Shape 6"/>
-          <p:cNvSpPr/>
-          <p:nvPr/>
-        </p:nvSpPr>
-        <p:spPr>
-          <a:xfrm>
-            <a:off x="502920" y="3474720"/>
-            <a:ext cx="11155680" cy="2148840"/>
-          </a:xfrm>
-          <a:prstGeom prst="rect">
-            <a:avLst/>
-          </a:prstGeom>
-          <a:solidFill>
-            <a:srgbClr val="1C2A22"/>
-          </a:solidFill>
-          <a:ln/>
-          <a:effectLst>
-            <a:outerShdw blurRad="50800" dist="38100" dir="8100000" algn="tr" rotWithShape="0">
-              <a:prstClr val="black">
-                <a:alpha val="40000"/>
-              </a:prstClr>
-            </a:outerShdw>
-          </a:effectLst>
-        </p:spPr>
-        <p:txBody>
-          <a:bodyPr/>
-          <a:lstStyle/>
-          <a:p>
-            <a:endParaRPr lang="en-US"/>
-          </a:p>
-        </p:txBody>
-      </p:sp>
-      <p:sp>
-        <p:nvSpPr>
-          <p:cNvPr id="9" name="Text 7"/>
-          <p:cNvSpPr/>
-          <p:nvPr/>
-        </p:nvSpPr>
-        <p:spPr>
-          <a:xfrm>
-            <a:off x="731520" y="3611880"/>
-            <a:ext cx="5486400" cy="256032"/>
-          </a:xfrm>
-          <a:prstGeom prst="rect">
-            <a:avLst/>
-          </a:prstGeom>
-          <a:noFill/>
-          <a:ln/>
-        </p:spPr>
-        <p:txBody>
-          <a:bodyPr wrap="square" lIns="0" tIns="0" rIns="0" bIns="0" rtlCol="0" anchor="ctr"/>
-          <a:lstStyle/>
-          <a:p>
-            <a:pPr marL="0" indent="0">
-              <a:buNone/>
-            </a:pPr>
-            <a:r>
-              <a:rPr lang="en-US" sz="1200" b="1" kern="0" spc="140" dirty="0">
-                <a:solidFill>
-                  <a:srgbClr val="B79A68"/>
-                </a:solidFill>
-                <a:latin typeface="Calibri" pitchFamily="34" charset="0"/>
-                <a:ea typeface="Calibri" pitchFamily="34" charset="-122"/>
-                <a:cs typeface="Calibri" pitchFamily="34" charset="-120"/>
-              </a:rPr>
-              <a:t>SMOKER, AT BMI 30</a:t>
-            </a:r>
-            <a:endParaRPr lang="en-US" sz="1200" dirty="0"/>
-          </a:p>
-        </p:txBody>
-      </p:sp>
-      <p:sp>
-        <p:nvSpPr>
-          <p:cNvPr id="10" name="Text 8"/>
-          <p:cNvSpPr/>
-          <p:nvPr/>
-        </p:nvSpPr>
-        <p:spPr>
-          <a:xfrm>
-            <a:off x="731520" y="3950208"/>
-            <a:ext cx="10607040" cy="1463040"/>
-          </a:xfrm>
-          <a:prstGeom prst="rect">
-            <a:avLst/>
-          </a:prstGeom>
-          <a:noFill/>
-          <a:ln/>
-        </p:spPr>
-        <p:txBody>
-          <a:bodyPr wrap="square" lIns="0" tIns="0" rIns="0" bIns="0" rtlCol="0" anchor="ctr"/>
-          <a:lstStyle/>
-          <a:p>
-            <a:pPr marL="0" indent="0">
-              <a:buNone/>
-            </a:pPr>
-            <a:r>
-              <a:rPr lang="en-US" sz="1600" dirty="0">
-                <a:solidFill>
-                  <a:srgbClr val="F1EADA"/>
-                </a:solidFill>
-                <a:latin typeface="Calibri" pitchFamily="34" charset="0"/>
-                <a:ea typeface="Calibri" pitchFamily="34" charset="-122"/>
-                <a:cs typeface="Calibri" pitchFamily="34" charset="-120"/>
-              </a:rPr>
-              <a:t>Holding age, children, and region fixed, a smoker at BMI 30 has mean charges $22,833 higher than a non-smoker at the same BMI. The paired bootstrap interval is $22,045 to $23,566. At BMI 25 the gap is $15,643. At BMI 35 it is $30,024. This describes the file. It is not what the bill would do if a particular person stopped smoking.</a:t>
-            </a:r>
-            <a:endParaRPr lang="en-US" sz="1600" dirty="0"/>
-          </a:p>
-        </p:txBody>
-      </p:sp>
-      <p:sp>
-        <p:nvSpPr>
-          <p:cNvPr id="11" name="Text 9"/>
-          <p:cNvSpPr/>
-          <p:nvPr/>
-        </p:nvSpPr>
-        <p:spPr>
-          <a:xfrm>
-            <a:off x="502920" y="6473952"/>
-            <a:ext cx="5943600" cy="237744"/>
-          </a:xfrm>
-          <a:prstGeom prst="rect">
-            <a:avLst/>
-          </a:prstGeom>
-          <a:noFill/>
-          <a:ln/>
-        </p:spPr>
-        <p:txBody>
-          <a:bodyPr wrap="square" lIns="0" tIns="0" rIns="0" bIns="0" rtlCol="0" anchor="ctr"/>
-          <a:lstStyle/>
-          <a:p>
-            <a:pPr marL="0" indent="0">
-              <a:buNone/>
-            </a:pPr>
-            <a:r>
-              <a:rPr lang="en-US" sz="1000" dirty="0">
-                <a:solidFill>
-                  <a:srgbClr val="5F7265"/>
-                </a:solidFill>
-                <a:latin typeface="Calibri" pitchFamily="34" charset="0"/>
-                <a:ea typeface="Calibri" pitchFamily="34" charset="-122"/>
-                <a:cs typeface="Calibri" pitchFamily="34" charset="-120"/>
-              </a:rPr>
-              <a:t>HEALTH-ACCOUNT CHARGES</a:t>
-            </a:r>
-            <a:endParaRPr lang="en-US" sz="1000" dirty="0"/>
-          </a:p>
-        </p:txBody>
-      </p:sp>
-      <p:sp>
-        <p:nvSpPr>
-          <p:cNvPr id="12" name="Text 10"/>
-          <p:cNvSpPr/>
-          <p:nvPr/>
-        </p:nvSpPr>
-        <p:spPr>
-          <a:xfrm>
-            <a:off x="9509760" y="6473952"/>
-            <a:ext cx="2194560" cy="237744"/>
-          </a:xfrm>
-          <a:prstGeom prst="rect">
-            <a:avLst/>
-          </a:prstGeom>
-          <a:noFill/>
-          <a:ln/>
-        </p:spPr>
-        <p:txBody>
-          <a:bodyPr wrap="square" lIns="0" tIns="0" rIns="0" bIns="0" rtlCol="0" anchor="ctr"/>
-          <a:lstStyle/>
-          <a:p>
-            <a:pPr marL="0" indent="0" algn="r">
-              <a:buNone/>
-            </a:pPr>
-            <a:r>
-              <a:rPr lang="en-US" sz="1000" dirty="0">
-                <a:solidFill>
-                  <a:srgbClr val="5F7265"/>
-                </a:solidFill>
-                <a:latin typeface="Calibri" pitchFamily="34" charset="0"/>
-                <a:ea typeface="Calibri" pitchFamily="34" charset="-122"/>
-                <a:cs typeface="Calibri" pitchFamily="34" charset="-120"/>
-              </a:rPr>
-              <a:t>07  /  15</a:t>
-            </a:r>
-            <a:endParaRPr lang="en-US" sz="1000" dirty="0"/>
-          </a:p>
-        </p:txBody>
-      </p:sp>
       <p:pic>
         <p:nvPicPr>
           <p:cNvPr id="13" name="Picture 12">
@@ -5158,6 +4739,425 @@
           </a:prstGeom>
         </p:spPr>
       </p:pic>
+      <p:sp>
+        <p:nvSpPr>
+          <p:cNvPr id="2" name="Text 0"/>
+          <p:cNvSpPr/>
+          <p:nvPr/>
+        </p:nvSpPr>
+        <p:spPr>
+          <a:xfrm>
+            <a:off x="502920" y="256032"/>
+            <a:ext cx="3840480" cy="256032"/>
+          </a:xfrm>
+          <a:prstGeom prst="rect">
+            <a:avLst/>
+          </a:prstGeom>
+          <a:noFill/>
+          <a:ln/>
+        </p:spPr>
+        <p:txBody>
+          <a:bodyPr wrap="square" lIns="0" tIns="0" rIns="0" bIns="0" rtlCol="0" anchor="ctr"/>
+          <a:lstStyle/>
+          <a:p>
+            <a:pPr marL="0" indent="0">
+              <a:buNone/>
+            </a:pPr>
+            <a:r>
+              <a:rPr lang="en-US" sz="1100" b="1" kern="0" spc="160" dirty="0">
+                <a:solidFill>
+                  <a:srgbClr val="1C2A22"/>
+                </a:solidFill>
+                <a:latin typeface="Calibri" pitchFamily="34" charset="0"/>
+                <a:ea typeface="Calibri" pitchFamily="34" charset="-122"/>
+                <a:cs typeface="Calibri" pitchFamily="34" charset="-120"/>
+              </a:rPr>
+              <a:t>POWELL   ·   BUI</a:t>
+            </a:r>
+            <a:endParaRPr lang="en-US" sz="1100" dirty="0"/>
+          </a:p>
+        </p:txBody>
+      </p:sp>
+      <p:sp>
+        <p:nvSpPr>
+          <p:cNvPr id="3" name="Text 1"/>
+          <p:cNvSpPr/>
+          <p:nvPr/>
+        </p:nvSpPr>
+        <p:spPr>
+          <a:xfrm>
+            <a:off x="6675120" y="256032"/>
+            <a:ext cx="5029200" cy="256032"/>
+          </a:xfrm>
+          <a:prstGeom prst="rect">
+            <a:avLst/>
+          </a:prstGeom>
+          <a:noFill/>
+          <a:ln/>
+        </p:spPr>
+        <p:txBody>
+          <a:bodyPr wrap="square" lIns="0" tIns="0" rIns="0" bIns="0" rtlCol="0" anchor="ctr"/>
+          <a:lstStyle/>
+          <a:p>
+            <a:pPr marL="0" indent="0" algn="r">
+              <a:buNone/>
+            </a:pPr>
+            <a:r>
+              <a:rPr lang="en-US" sz="1100" kern="0" spc="140" dirty="0">
+                <a:solidFill>
+                  <a:srgbClr val="5F7265"/>
+                </a:solidFill>
+                <a:latin typeface="Calibri" pitchFamily="34" charset="0"/>
+                <a:ea typeface="Calibri" pitchFamily="34" charset="-122"/>
+                <a:cs typeface="Calibri" pitchFamily="34" charset="-120"/>
+              </a:rPr>
+              <a:t>THE EQUATION</a:t>
+            </a:r>
+            <a:endParaRPr lang="en-US" sz="1100" dirty="0"/>
+          </a:p>
+        </p:txBody>
+      </p:sp>
+      <p:sp>
+        <p:nvSpPr>
+          <p:cNvPr id="4" name="Text 2"/>
+          <p:cNvSpPr/>
+          <p:nvPr/>
+        </p:nvSpPr>
+        <p:spPr>
+          <a:xfrm>
+            <a:off x="502920" y="685800"/>
+            <a:ext cx="10972800" cy="411480"/>
+          </a:xfrm>
+          <a:prstGeom prst="rect">
+            <a:avLst/>
+          </a:prstGeom>
+          <a:noFill/>
+          <a:ln/>
+        </p:spPr>
+        <p:txBody>
+          <a:bodyPr wrap="square" lIns="0" tIns="0" rIns="0" bIns="0" rtlCol="0" anchor="ctr"/>
+          <a:lstStyle/>
+          <a:p>
+            <a:pPr marL="0" indent="0">
+              <a:buNone/>
+            </a:pPr>
+            <a:r>
+              <a:rPr lang="en-US" sz="2800" dirty="0">
+                <a:solidFill>
+                  <a:srgbClr val="1C2A22"/>
+                </a:solidFill>
+                <a:latin typeface="Georgia" pitchFamily="34" charset="0"/>
+                <a:ea typeface="Georgia" pitchFamily="34" charset="-122"/>
+                <a:cs typeface="Georgia" pitchFamily="34" charset="-120"/>
+              </a:rPr>
+              <a:t>Detailed Insights</a:t>
+            </a:r>
+            <a:endParaRPr lang="en-US" sz="2800" dirty="0"/>
+          </a:p>
+        </p:txBody>
+      </p:sp>
+      <p:sp>
+        <p:nvSpPr>
+          <p:cNvPr id="5" name="Shape 3"/>
+          <p:cNvSpPr/>
+          <p:nvPr/>
+        </p:nvSpPr>
+        <p:spPr>
+          <a:xfrm>
+            <a:off x="502920" y="1325880"/>
+            <a:ext cx="11155680" cy="1965960"/>
+          </a:xfrm>
+          <a:prstGeom prst="rect">
+            <a:avLst/>
+          </a:prstGeom>
+          <a:solidFill>
+            <a:srgbClr val="F7F1E2"/>
+          </a:solidFill>
+          <a:ln/>
+          <a:effectLst>
+            <a:outerShdw blurRad="50800" dist="38100" dir="8100000" algn="tr" rotWithShape="0">
+              <a:prstClr val="black">
+                <a:alpha val="40000"/>
+              </a:prstClr>
+            </a:outerShdw>
+          </a:effectLst>
+        </p:spPr>
+        <p:txBody>
+          <a:bodyPr/>
+          <a:lstStyle/>
+          <a:p>
+            <a:endParaRPr lang="en-US"/>
+          </a:p>
+        </p:txBody>
+      </p:sp>
+      <p:sp>
+        <p:nvSpPr>
+          <p:cNvPr id="6" name="Text 4"/>
+          <p:cNvSpPr/>
+          <p:nvPr/>
+        </p:nvSpPr>
+        <p:spPr>
+          <a:xfrm>
+            <a:off x="731520" y="1463040"/>
+            <a:ext cx="1828800" cy="256032"/>
+          </a:xfrm>
+          <a:prstGeom prst="rect">
+            <a:avLst/>
+          </a:prstGeom>
+          <a:noFill/>
+          <a:ln/>
+        </p:spPr>
+        <p:txBody>
+          <a:bodyPr wrap="square" lIns="0" tIns="0" rIns="0" bIns="0" rtlCol="0" anchor="ctr"/>
+          <a:lstStyle/>
+          <a:p>
+            <a:pPr marL="0" indent="0">
+              <a:buNone/>
+            </a:pPr>
+            <a:r>
+              <a:rPr lang="en-US" sz="1200" b="1" kern="0" spc="140" dirty="0">
+                <a:solidFill>
+                  <a:srgbClr val="9D7D3B"/>
+                </a:solidFill>
+                <a:latin typeface="Calibri" pitchFamily="34" charset="0"/>
+                <a:ea typeface="Calibri" pitchFamily="34" charset="-122"/>
+                <a:cs typeface="Calibri" pitchFamily="34" charset="-120"/>
+              </a:rPr>
+              <a:t>AGE</a:t>
+            </a:r>
+            <a:endParaRPr lang="en-US" sz="1200" dirty="0"/>
+          </a:p>
+        </p:txBody>
+      </p:sp>
+      <p:sp>
+        <p:nvSpPr>
+          <p:cNvPr id="7" name="Text 5"/>
+          <p:cNvSpPr/>
+          <p:nvPr/>
+        </p:nvSpPr>
+        <p:spPr>
+          <a:xfrm>
+            <a:off x="731520" y="1783080"/>
+            <a:ext cx="10607040" cy="1280160"/>
+          </a:xfrm>
+          <a:prstGeom prst="rect">
+            <a:avLst/>
+          </a:prstGeom>
+          <a:noFill/>
+          <a:ln/>
+        </p:spPr>
+        <p:txBody>
+          <a:bodyPr wrap="square" lIns="0" tIns="0" rIns="0" bIns="0" rtlCol="0" anchor="ctr"/>
+          <a:lstStyle/>
+          <a:p>
+            <a:pPr marL="0" indent="0">
+              <a:buNone/>
+            </a:pPr>
+            <a:r>
+              <a:rPr lang="en-US" sz="1600" dirty="0">
+                <a:solidFill>
+                  <a:srgbClr val="1C2A22"/>
+                </a:solidFill>
+                <a:latin typeface="Calibri" pitchFamily="34" charset="0"/>
+                <a:ea typeface="Calibri" pitchFamily="34" charset="-122"/>
+                <a:cs typeface="Calibri" pitchFamily="34" charset="-120"/>
+              </a:rPr>
+              <a:t>Holding BMI, smoking, children, and region fixed, one more year of age is associated with $264 higher mean charges. Ordinary 95% interval $245 to $283. The paired bootstrap interval is the same. About 2% of the average bill. Same slope in both groups.</a:t>
+            </a:r>
+            <a:endParaRPr lang="en-US" sz="1600" dirty="0"/>
+          </a:p>
+        </p:txBody>
+      </p:sp>
+      <p:sp>
+        <p:nvSpPr>
+          <p:cNvPr id="8" name="Shape 6"/>
+          <p:cNvSpPr/>
+          <p:nvPr/>
+        </p:nvSpPr>
+        <p:spPr>
+          <a:xfrm>
+            <a:off x="502920" y="3474720"/>
+            <a:ext cx="11155680" cy="2148840"/>
+          </a:xfrm>
+          <a:prstGeom prst="rect">
+            <a:avLst/>
+          </a:prstGeom>
+          <a:solidFill>
+            <a:srgbClr val="1C2A22"/>
+          </a:solidFill>
+          <a:ln/>
+          <a:effectLst>
+            <a:outerShdw blurRad="50800" dist="38100" dir="8100000" algn="tr" rotWithShape="0">
+              <a:prstClr val="black">
+                <a:alpha val="40000"/>
+              </a:prstClr>
+            </a:outerShdw>
+          </a:effectLst>
+        </p:spPr>
+        <p:txBody>
+          <a:bodyPr/>
+          <a:lstStyle/>
+          <a:p>
+            <a:endParaRPr lang="en-US"/>
+          </a:p>
+        </p:txBody>
+      </p:sp>
+      <p:sp>
+        <p:nvSpPr>
+          <p:cNvPr id="9" name="Text 7"/>
+          <p:cNvSpPr/>
+          <p:nvPr/>
+        </p:nvSpPr>
+        <p:spPr>
+          <a:xfrm>
+            <a:off x="731520" y="3611880"/>
+            <a:ext cx="5486400" cy="256032"/>
+          </a:xfrm>
+          <a:prstGeom prst="rect">
+            <a:avLst/>
+          </a:prstGeom>
+          <a:noFill/>
+          <a:ln/>
+        </p:spPr>
+        <p:txBody>
+          <a:bodyPr wrap="square" lIns="0" tIns="0" rIns="0" bIns="0" rtlCol="0" anchor="ctr"/>
+          <a:lstStyle/>
+          <a:p>
+            <a:pPr marL="0" indent="0">
+              <a:buNone/>
+            </a:pPr>
+            <a:r>
+              <a:rPr lang="en-US" sz="1200" b="1" kern="0" spc="140" dirty="0">
+                <a:solidFill>
+                  <a:srgbClr val="B79A68"/>
+                </a:solidFill>
+                <a:latin typeface="Calibri" pitchFamily="34" charset="0"/>
+                <a:ea typeface="Calibri" pitchFamily="34" charset="-122"/>
+                <a:cs typeface="Calibri" pitchFamily="34" charset="-120"/>
+              </a:rPr>
+              <a:t>SMOKER, AT BMI 30</a:t>
+            </a:r>
+            <a:endParaRPr lang="en-US" sz="1200" dirty="0"/>
+          </a:p>
+        </p:txBody>
+      </p:sp>
+      <p:sp>
+        <p:nvSpPr>
+          <p:cNvPr id="10" name="Text 8"/>
+          <p:cNvSpPr/>
+          <p:nvPr/>
+        </p:nvSpPr>
+        <p:spPr>
+          <a:xfrm>
+            <a:off x="731520" y="3950208"/>
+            <a:ext cx="10607040" cy="1463040"/>
+          </a:xfrm>
+          <a:prstGeom prst="rect">
+            <a:avLst/>
+          </a:prstGeom>
+          <a:noFill/>
+          <a:ln/>
+        </p:spPr>
+        <p:txBody>
+          <a:bodyPr wrap="square" lIns="0" tIns="0" rIns="0" bIns="0" rtlCol="0" anchor="ctr"/>
+          <a:lstStyle/>
+          <a:p>
+            <a:pPr marL="0" indent="0">
+              <a:buNone/>
+            </a:pPr>
+            <a:r>
+              <a:rPr lang="en-US" sz="1600" dirty="0">
+                <a:solidFill>
+                  <a:srgbClr val="F1EADA"/>
+                </a:solidFill>
+                <a:latin typeface="Calibri" pitchFamily="34" charset="0"/>
+                <a:ea typeface="Calibri" pitchFamily="34" charset="-122"/>
+                <a:cs typeface="Calibri" pitchFamily="34" charset="-120"/>
+              </a:rPr>
+              <a:t>Holding age, children, and region fixed, a smoker at BMI 30 has mean charges $22,833 higher than a non-smoker at the same BMI. The paired bootstrap interval is $22,045 to $23,566. At BMI 25 the gap is $15,643. At BMI 35 it is $30,024. This describes the file. It is not what the bill would do if a particular person stopped smoking.</a:t>
+            </a:r>
+            <a:endParaRPr lang="en-US" sz="1600" dirty="0"/>
+          </a:p>
+        </p:txBody>
+      </p:sp>
+      <p:sp>
+        <p:nvSpPr>
+          <p:cNvPr id="11" name="Text 9"/>
+          <p:cNvSpPr/>
+          <p:nvPr/>
+        </p:nvSpPr>
+        <p:spPr>
+          <a:xfrm>
+            <a:off x="502920" y="6473952"/>
+            <a:ext cx="5943600" cy="237744"/>
+          </a:xfrm>
+          <a:prstGeom prst="rect">
+            <a:avLst/>
+          </a:prstGeom>
+          <a:noFill/>
+          <a:ln/>
+        </p:spPr>
+        <p:txBody>
+          <a:bodyPr wrap="square" lIns="0" tIns="0" rIns="0" bIns="0" rtlCol="0" anchor="ctr"/>
+          <a:lstStyle/>
+          <a:p>
+            <a:pPr marL="0" indent="0">
+              <a:buNone/>
+            </a:pPr>
+            <a:r>
+              <a:rPr lang="en-US" sz="1000" dirty="0">
+                <a:solidFill>
+                  <a:srgbClr val="5F7265"/>
+                </a:solidFill>
+                <a:latin typeface="Calibri" pitchFamily="34" charset="0"/>
+                <a:ea typeface="Calibri" pitchFamily="34" charset="-122"/>
+                <a:cs typeface="Calibri" pitchFamily="34" charset="-120"/>
+              </a:rPr>
+              <a:t>HEALTH-ACCOUNT CHARGES</a:t>
+            </a:r>
+            <a:endParaRPr lang="en-US" sz="1000" dirty="0"/>
+          </a:p>
+        </p:txBody>
+      </p:sp>
+      <p:sp>
+        <p:nvSpPr>
+          <p:cNvPr id="12" name="Text 10"/>
+          <p:cNvSpPr/>
+          <p:nvPr/>
+        </p:nvSpPr>
+        <p:spPr>
+          <a:xfrm>
+            <a:off x="9509760" y="6473952"/>
+            <a:ext cx="2194560" cy="237744"/>
+          </a:xfrm>
+          <a:prstGeom prst="rect">
+            <a:avLst/>
+          </a:prstGeom>
+          <a:noFill/>
+          <a:ln/>
+        </p:spPr>
+        <p:txBody>
+          <a:bodyPr wrap="square" lIns="0" tIns="0" rIns="0" bIns="0" rtlCol="0" anchor="ctr"/>
+          <a:lstStyle/>
+          <a:p>
+            <a:pPr marL="0" indent="0" algn="r">
+              <a:buNone/>
+            </a:pPr>
+            <a:r>
+              <a:rPr lang="en-US" sz="1000" dirty="0">
+                <a:solidFill>
+                  <a:srgbClr val="5F7265"/>
+                </a:solidFill>
+                <a:latin typeface="Calibri" pitchFamily="34" charset="0"/>
+                <a:ea typeface="Calibri" pitchFamily="34" charset="-122"/>
+                <a:cs typeface="Calibri" pitchFamily="34" charset="-120"/>
+              </a:rPr>
+              <a:t>14  /  15</a:t>
+            </a:r>
+            <a:endParaRPr lang="en-US" sz="1000" dirty="0"/>
+          </a:p>
+        </p:txBody>
+      </p:sp>
     </p:spTree>
   </p:cSld>
   <p:clrMapOvr>
@@ -14053,7 +14053,7 @@
                 <a:ea typeface="Calibri" pitchFamily="34" charset="-122"/>
                 <a:cs typeface="Calibri" pitchFamily="34" charset="-120"/>
               </a:rPr>
-              <a:t>08  /  15</a:t>
+              <a:t>07 /  15</a:t>
             </a:r>
             <a:endParaRPr lang="en-US" sz="1000" dirty="0"/>
           </a:p>
@@ -15961,123 +15961,6 @@
           </a:graphicData>
         </a:graphic>
       </p:graphicFrame>
-      <p:sp>
-        <p:nvSpPr>
-          <p:cNvPr id="6" name="Text 3"/>
-          <p:cNvSpPr/>
-          <p:nvPr/>
-        </p:nvSpPr>
-        <p:spPr>
-          <a:xfrm>
-            <a:off x="502920" y="5166360"/>
-            <a:ext cx="11155680" cy="640080"/>
-          </a:xfrm>
-          <a:prstGeom prst="rect">
-            <a:avLst/>
-          </a:prstGeom>
-          <a:noFill/>
-          <a:ln/>
-        </p:spPr>
-        <p:txBody>
-          <a:bodyPr wrap="square" lIns="0" tIns="0" rIns="0" bIns="0" rtlCol="0" anchor="ctr"/>
-          <a:lstStyle/>
-          <a:p>
-            <a:pPr marL="0" indent="0">
-              <a:buNone/>
-            </a:pPr>
-            <a:r>
-              <a:rPr lang="en-US" sz="1500" dirty="0">
-                <a:solidFill>
-                  <a:srgbClr val="4E463C"/>
-                </a:solidFill>
-                <a:latin typeface="Calibri" pitchFamily="34" charset="0"/>
-                <a:ea typeface="Calibri" pitchFamily="34" charset="-122"/>
-                <a:cs typeface="Calibri" pitchFamily="34" charset="-120"/>
-              </a:rPr>
-              <a:t>Term search wins on AIC and loses on RMSE. Averaged trees win the holdout and lose the CV. The forest wins both. </a:t>
-            </a:r>
-            <a:endParaRPr lang="en-US" sz="1500" dirty="0"/>
-          </a:p>
-        </p:txBody>
-      </p:sp>
-      <p:sp>
-        <p:nvSpPr>
-          <p:cNvPr id="7" name="Text 4"/>
-          <p:cNvSpPr/>
-          <p:nvPr/>
-        </p:nvSpPr>
-        <p:spPr>
-          <a:xfrm>
-            <a:off x="502920" y="6473952"/>
-            <a:ext cx="5943600" cy="237744"/>
-          </a:xfrm>
-          <a:prstGeom prst="rect">
-            <a:avLst/>
-          </a:prstGeom>
-          <a:noFill/>
-          <a:ln/>
-        </p:spPr>
-        <p:txBody>
-          <a:bodyPr wrap="square" lIns="0" tIns="0" rIns="0" bIns="0" rtlCol="0" anchor="ctr"/>
-          <a:lstStyle/>
-          <a:p>
-            <a:pPr marL="0" indent="0">
-              <a:buNone/>
-            </a:pPr>
-            <a:r>
-              <a:rPr lang="en-US" sz="1000" dirty="0">
-                <a:solidFill>
-                  <a:srgbClr val="5F7265"/>
-                </a:solidFill>
-                <a:latin typeface="Calibri" pitchFamily="34" charset="0"/>
-                <a:ea typeface="Calibri" pitchFamily="34" charset="-122"/>
-                <a:cs typeface="Calibri" pitchFamily="34" charset="-120"/>
-              </a:rPr>
-              <a:t>HEALTH-ACCOUNT CHARGES</a:t>
-            </a:r>
-            <a:endParaRPr lang="en-US" sz="1000" dirty="0"/>
-          </a:p>
-        </p:txBody>
-      </p:sp>
-      <p:sp>
-        <p:nvSpPr>
-          <p:cNvPr id="8" name="Text 5"/>
-          <p:cNvSpPr/>
-          <p:nvPr/>
-        </p:nvSpPr>
-        <p:spPr>
-          <a:xfrm>
-            <a:off x="9509760" y="6473952"/>
-            <a:ext cx="2194560" cy="237744"/>
-          </a:xfrm>
-          <a:prstGeom prst="rect">
-            <a:avLst/>
-          </a:prstGeom>
-          <a:noFill/>
-          <a:ln/>
-        </p:spPr>
-        <p:txBody>
-          <a:bodyPr wrap="square" lIns="0" tIns="0" rIns="0" bIns="0" rtlCol="0" anchor="ctr"/>
-          <a:lstStyle/>
-          <a:p>
-            <a:pPr marL="0" indent="0" algn="r">
-              <a:buNone/>
-            </a:pPr>
-            <a:r>
-              <a:rPr lang="en-US" sz="1000" dirty="0">
-                <a:solidFill>
-                  <a:srgbClr val="5F7265"/>
-                </a:solidFill>
-                <a:latin typeface="Calibri" pitchFamily="34" charset="0"/>
-                <a:ea typeface="Calibri" pitchFamily="34" charset="-122"/>
-                <a:cs typeface="Calibri" pitchFamily="34" charset="-120"/>
-              </a:rPr>
-              <a:t>09  /  15</a:t>
-            </a:r>
-            <a:endParaRPr lang="en-US" sz="1000" dirty="0"/>
-          </a:p>
-        </p:txBody>
-      </p:sp>
       <p:pic>
         <p:nvPicPr>
           <p:cNvPr id="5" name="Picture 4">
@@ -16119,6 +16002,123 @@
           </a:prstGeom>
         </p:spPr>
       </p:pic>
+      <p:sp>
+        <p:nvSpPr>
+          <p:cNvPr id="6" name="Text 3"/>
+          <p:cNvSpPr/>
+          <p:nvPr/>
+        </p:nvSpPr>
+        <p:spPr>
+          <a:xfrm>
+            <a:off x="502920" y="5166360"/>
+            <a:ext cx="11155680" cy="640080"/>
+          </a:xfrm>
+          <a:prstGeom prst="rect">
+            <a:avLst/>
+          </a:prstGeom>
+          <a:noFill/>
+          <a:ln/>
+        </p:spPr>
+        <p:txBody>
+          <a:bodyPr wrap="square" lIns="0" tIns="0" rIns="0" bIns="0" rtlCol="0" anchor="ctr"/>
+          <a:lstStyle/>
+          <a:p>
+            <a:pPr marL="0" indent="0">
+              <a:buNone/>
+            </a:pPr>
+            <a:r>
+              <a:rPr lang="en-US" sz="1500" dirty="0">
+                <a:solidFill>
+                  <a:srgbClr val="4E463C"/>
+                </a:solidFill>
+                <a:latin typeface="Calibri" pitchFamily="34" charset="0"/>
+                <a:ea typeface="Calibri" pitchFamily="34" charset="-122"/>
+                <a:cs typeface="Calibri" pitchFamily="34" charset="-120"/>
+              </a:rPr>
+              <a:t>Term search wins on AIC and loses on RMSE. Averaged trees win the holdout and lose the CV. The forest wins both. </a:t>
+            </a:r>
+            <a:endParaRPr lang="en-US" sz="1500" dirty="0"/>
+          </a:p>
+        </p:txBody>
+      </p:sp>
+      <p:sp>
+        <p:nvSpPr>
+          <p:cNvPr id="7" name="Text 4"/>
+          <p:cNvSpPr/>
+          <p:nvPr/>
+        </p:nvSpPr>
+        <p:spPr>
+          <a:xfrm>
+            <a:off x="502920" y="6473952"/>
+            <a:ext cx="5943600" cy="237744"/>
+          </a:xfrm>
+          <a:prstGeom prst="rect">
+            <a:avLst/>
+          </a:prstGeom>
+          <a:noFill/>
+          <a:ln/>
+        </p:spPr>
+        <p:txBody>
+          <a:bodyPr wrap="square" lIns="0" tIns="0" rIns="0" bIns="0" rtlCol="0" anchor="ctr"/>
+          <a:lstStyle/>
+          <a:p>
+            <a:pPr marL="0" indent="0">
+              <a:buNone/>
+            </a:pPr>
+            <a:r>
+              <a:rPr lang="en-US" sz="1000" dirty="0">
+                <a:solidFill>
+                  <a:srgbClr val="5F7265"/>
+                </a:solidFill>
+                <a:latin typeface="Calibri" pitchFamily="34" charset="0"/>
+                <a:ea typeface="Calibri" pitchFamily="34" charset="-122"/>
+                <a:cs typeface="Calibri" pitchFamily="34" charset="-120"/>
+              </a:rPr>
+              <a:t>HEALTH-ACCOUNT CHARGES</a:t>
+            </a:r>
+            <a:endParaRPr lang="en-US" sz="1000" dirty="0"/>
+          </a:p>
+        </p:txBody>
+      </p:sp>
+      <p:sp>
+        <p:nvSpPr>
+          <p:cNvPr id="8" name="Text 5"/>
+          <p:cNvSpPr/>
+          <p:nvPr/>
+        </p:nvSpPr>
+        <p:spPr>
+          <a:xfrm>
+            <a:off x="9509760" y="6473952"/>
+            <a:ext cx="2194560" cy="237744"/>
+          </a:xfrm>
+          <a:prstGeom prst="rect">
+            <a:avLst/>
+          </a:prstGeom>
+          <a:noFill/>
+          <a:ln/>
+        </p:spPr>
+        <p:txBody>
+          <a:bodyPr wrap="square" lIns="0" tIns="0" rIns="0" bIns="0" rtlCol="0" anchor="ctr"/>
+          <a:lstStyle/>
+          <a:p>
+            <a:pPr marL="0" indent="0" algn="r">
+              <a:buNone/>
+            </a:pPr>
+            <a:r>
+              <a:rPr lang="en-US" sz="1000" dirty="0">
+                <a:solidFill>
+                  <a:srgbClr val="5F7265"/>
+                </a:solidFill>
+                <a:latin typeface="Calibri" pitchFamily="34" charset="0"/>
+                <a:ea typeface="Calibri" pitchFamily="34" charset="-122"/>
+                <a:cs typeface="Calibri" pitchFamily="34" charset="-120"/>
+              </a:rPr>
+              <a:t>08 /  15</a:t>
+            </a:r>
+            <a:endParaRPr lang="en-US" sz="1000" dirty="0"/>
+          </a:p>
+        </p:txBody>
+      </p:sp>
       <p:sp>
         <p:nvSpPr>
           <p:cNvPr id="12" name="Text 2">
@@ -16387,7 +16387,7 @@
                 <a:ea typeface="Calibri" pitchFamily="34" charset="-122"/>
                 <a:cs typeface="Calibri" pitchFamily="34" charset="-120"/>
               </a:rPr>
-              <a:t>10  /  15</a:t>
+              <a:t>09  /  15</a:t>
             </a:r>
             <a:endParaRPr lang="en-US" sz="1000" dirty="0"/>
           </a:p>
